--- a/docs/slide/post02_incident_response.pptx
+++ b/docs/slide/post02_incident_response.pptx
@@ -135,8 +135,7 @@
 <file path=ppt/revisionInfo.xml><?xml version="1.0" encoding="utf-8"?>
 <p1510:revInfo xmlns:a="http://schemas.openxmlformats.org/drawingml/2006/main" xmlns:r="http://schemas.openxmlformats.org/officeDocument/2006/relationships" xmlns:p1510="http://schemas.microsoft.com/office/powerpoint/2015/10/main">
   <p1510:revLst>
-    <p1510:client id="{6AFEEB8B-BB36-4A3A-B06E-F26CB7EBBCFC}" v="557" dt="2026-10-22T02:23:34.401"/>
-    <p1510:client id="{90388DFC-2480-48D6-ACA5-3B253BE164C6}" v="5681" dt="2026-10-21T21:52:59.412"/>
+    <p1510:client id="{6AFEEB8B-BB36-4A3A-B06E-F26CB7EBBCFC}" v="558" dt="2026-10-23T20:29:40.028"/>
   </p1510:revLst>
 </p1510:revInfo>
 </file>
@@ -146,12 +145,12 @@
   <pc:docChgLst>
     <pc:chgData name="Simon Fong" userId="0989948daaec8292" providerId="LiveId" clId="{F12E0490-60F3-4147-9D04-93D87D41D5A0}"/>
     <pc:docChg chg="undo redo custSel addSld delSld modSld sldOrd modMainMaster">
-      <pc:chgData name="Simon Fong" userId="0989948daaec8292" providerId="LiveId" clId="{F12E0490-60F3-4147-9D04-93D87D41D5A0}" dt="2026-10-22T02:23:34.401" v="13107"/>
+      <pc:chgData name="Simon Fong" userId="0989948daaec8292" providerId="LiveId" clId="{F12E0490-60F3-4147-9D04-93D87D41D5A0}" dt="2026-10-23T20:29:40.028" v="13108"/>
       <pc:docMkLst>
         <pc:docMk/>
       </pc:docMkLst>
       <pc:sldChg chg="addSp delSp modSp new mod modTransition setBg modClrScheme addAnim delAnim modAnim setClrOvrMap delDesignElem chgLayout">
-        <pc:chgData name="Simon Fong" userId="0989948daaec8292" providerId="LiveId" clId="{F12E0490-60F3-4147-9D04-93D87D41D5A0}" dt="2026-10-21T18:52:23.940" v="11643"/>
+        <pc:chgData name="Simon Fong" userId="0989948daaec8292" providerId="LiveId" clId="{F12E0490-60F3-4147-9D04-93D87D41D5A0}" dt="2026-10-23T20:29:40.028" v="13108"/>
         <pc:sldMkLst>
           <pc:docMk/>
           <pc:sldMk cId="500054961" sldId="256"/>
@@ -165,7 +164,7 @@
           </ac:spMkLst>
         </pc:spChg>
         <pc:spChg chg="mod">
-          <ac:chgData name="Simon Fong" userId="0989948daaec8292" providerId="LiveId" clId="{F12E0490-60F3-4147-9D04-93D87D41D5A0}" dt="2026-10-21T02:57:13.816" v="9107" actId="6549"/>
+          <ac:chgData name="Simon Fong" userId="0989948daaec8292" providerId="LiveId" clId="{F12E0490-60F3-4147-9D04-93D87D41D5A0}" dt="2026-10-23T20:29:40.028" v="13108"/>
           <ac:spMkLst>
             <pc:docMk/>
             <pc:sldMk cId="500054961" sldId="256"/>
@@ -180,213 +179,6 @@
             <ac:picMk id="32" creationId="{7158F0ED-9F1D-EFEC-3544-41B5BB8F4EAA}"/>
           </ac:picMkLst>
         </pc:picChg>
-      </pc:sldChg>
-      <pc:sldChg chg="addSp delSp modSp del mod modTransition setBg addAnim delAnim modAnim">
-        <pc:chgData name="Simon Fong" userId="0989948daaec8292" providerId="LiveId" clId="{F12E0490-60F3-4147-9D04-93D87D41D5A0}" dt="2026-10-21T12:25:18.662" v="10543" actId="2696"/>
-        <pc:sldMkLst>
-          <pc:docMk/>
-          <pc:sldMk cId="2614099860" sldId="299"/>
-        </pc:sldMkLst>
-        <pc:spChg chg="mod">
-          <ac:chgData name="Simon Fong" userId="0989948daaec8292" providerId="LiveId" clId="{F12E0490-60F3-4147-9D04-93D87D41D5A0}" dt="2026-10-21T02:59:25.117" v="9127" actId="20577"/>
-          <ac:spMkLst>
-            <pc:docMk/>
-            <pc:sldMk cId="2614099860" sldId="299"/>
-            <ac:spMk id="2" creationId="{376E43E4-9D12-5EDA-E94F-09F811677D74}"/>
-          </ac:spMkLst>
-        </pc:spChg>
-        <pc:spChg chg="add mod">
-          <ac:chgData name="Simon Fong" userId="0989948daaec8292" providerId="LiveId" clId="{F12E0490-60F3-4147-9D04-93D87D41D5A0}" dt="2026-10-21T12:25:09.460" v="10542" actId="6549"/>
-          <ac:spMkLst>
-            <pc:docMk/>
-            <pc:sldMk cId="2614099860" sldId="299"/>
-            <ac:spMk id="5" creationId="{53750D2B-5767-BF89-0278-6F14B78CCAE9}"/>
-          </ac:spMkLst>
-        </pc:spChg>
-        <pc:picChg chg="add del mod modCrop">
-          <ac:chgData name="Simon Fong" userId="0989948daaec8292" providerId="LiveId" clId="{F12E0490-60F3-4147-9D04-93D87D41D5A0}" dt="2026-10-21T12:25:04.646" v="10541" actId="478"/>
-          <ac:picMkLst>
-            <pc:docMk/>
-            <pc:sldMk cId="2614099860" sldId="299"/>
-            <ac:picMk id="15" creationId="{FE5B35CD-2239-6B58-7260-8A80856CCAEB}"/>
-          </ac:picMkLst>
-        </pc:picChg>
-      </pc:sldChg>
-      <pc:sldChg chg="del">
-        <pc:chgData name="Simon Fong" userId="0989948daaec8292" providerId="LiveId" clId="{F12E0490-60F3-4147-9D04-93D87D41D5A0}" dt="2026-10-21T01:53:59.202" v="9011" actId="47"/>
-        <pc:sldMkLst>
-          <pc:docMk/>
-          <pc:sldMk cId="3152548219" sldId="303"/>
-        </pc:sldMkLst>
-      </pc:sldChg>
-      <pc:sldChg chg="del">
-        <pc:chgData name="Simon Fong" userId="0989948daaec8292" providerId="LiveId" clId="{F12E0490-60F3-4147-9D04-93D87D41D5A0}" dt="2026-10-21T00:15:41.004" v="6188" actId="47"/>
-        <pc:sldMkLst>
-          <pc:docMk/>
-          <pc:sldMk cId="154950490" sldId="304"/>
-        </pc:sldMkLst>
-      </pc:sldChg>
-      <pc:sldChg chg="del">
-        <pc:chgData name="Simon Fong" userId="0989948daaec8292" providerId="LiveId" clId="{F12E0490-60F3-4147-9D04-93D87D41D5A0}" dt="2026-10-21T00:15:41.913" v="6189" actId="47"/>
-        <pc:sldMkLst>
-          <pc:docMk/>
-          <pc:sldMk cId="458410333" sldId="305"/>
-        </pc:sldMkLst>
-      </pc:sldChg>
-      <pc:sldChg chg="del">
-        <pc:chgData name="Simon Fong" userId="0989948daaec8292" providerId="LiveId" clId="{F12E0490-60F3-4147-9D04-93D87D41D5A0}" dt="2026-10-21T00:15:42.656" v="6190" actId="47"/>
-        <pc:sldMkLst>
-          <pc:docMk/>
-          <pc:sldMk cId="2965289231" sldId="307"/>
-        </pc:sldMkLst>
-      </pc:sldChg>
-      <pc:sldChg chg="del">
-        <pc:chgData name="Simon Fong" userId="0989948daaec8292" providerId="LiveId" clId="{F12E0490-60F3-4147-9D04-93D87D41D5A0}" dt="2026-10-21T00:15:45.381" v="6192" actId="47"/>
-        <pc:sldMkLst>
-          <pc:docMk/>
-          <pc:sldMk cId="1253844731" sldId="309"/>
-        </pc:sldMkLst>
-      </pc:sldChg>
-      <pc:sldChg chg="del">
-        <pc:chgData name="Simon Fong" userId="0989948daaec8292" providerId="LiveId" clId="{F12E0490-60F3-4147-9D04-93D87D41D5A0}" dt="2026-10-21T00:15:46.212" v="6193" actId="47"/>
-        <pc:sldMkLst>
-          <pc:docMk/>
-          <pc:sldMk cId="1940810225" sldId="310"/>
-        </pc:sldMkLst>
-      </pc:sldChg>
-      <pc:sldChg chg="del">
-        <pc:chgData name="Simon Fong" userId="0989948daaec8292" providerId="LiveId" clId="{F12E0490-60F3-4147-9D04-93D87D41D5A0}" dt="2026-10-21T00:15:46.988" v="6194" actId="47"/>
-        <pc:sldMkLst>
-          <pc:docMk/>
-          <pc:sldMk cId="445451169" sldId="311"/>
-        </pc:sldMkLst>
-      </pc:sldChg>
-      <pc:sldChg chg="del">
-        <pc:chgData name="Simon Fong" userId="0989948daaec8292" providerId="LiveId" clId="{F12E0490-60F3-4147-9D04-93D87D41D5A0}" dt="2026-10-21T00:15:47.797" v="6195" actId="47"/>
-        <pc:sldMkLst>
-          <pc:docMk/>
-          <pc:sldMk cId="629098228" sldId="312"/>
-        </pc:sldMkLst>
-      </pc:sldChg>
-      <pc:sldChg chg="del">
-        <pc:chgData name="Simon Fong" userId="0989948daaec8292" providerId="LiveId" clId="{F12E0490-60F3-4147-9D04-93D87D41D5A0}" dt="2026-10-21T00:15:48.600" v="6196" actId="47"/>
-        <pc:sldMkLst>
-          <pc:docMk/>
-          <pc:sldMk cId="3118197996" sldId="314"/>
-        </pc:sldMkLst>
-      </pc:sldChg>
-      <pc:sldChg chg="del">
-        <pc:chgData name="Simon Fong" userId="0989948daaec8292" providerId="LiveId" clId="{F12E0490-60F3-4147-9D04-93D87D41D5A0}" dt="2026-10-21T00:15:49.248" v="6197" actId="47"/>
-        <pc:sldMkLst>
-          <pc:docMk/>
-          <pc:sldMk cId="1980785618" sldId="315"/>
-        </pc:sldMkLst>
-      </pc:sldChg>
-      <pc:sldChg chg="del">
-        <pc:chgData name="Simon Fong" userId="0989948daaec8292" providerId="LiveId" clId="{F12E0490-60F3-4147-9D04-93D87D41D5A0}" dt="2026-10-21T00:15:50.110" v="6198" actId="47"/>
-        <pc:sldMkLst>
-          <pc:docMk/>
-          <pc:sldMk cId="336396854" sldId="316"/>
-        </pc:sldMkLst>
-      </pc:sldChg>
-      <pc:sldChg chg="del">
-        <pc:chgData name="Simon Fong" userId="0989948daaec8292" providerId="LiveId" clId="{F12E0490-60F3-4147-9D04-93D87D41D5A0}" dt="2026-10-21T00:15:50.862" v="6199" actId="47"/>
-        <pc:sldMkLst>
-          <pc:docMk/>
-          <pc:sldMk cId="3223453815" sldId="317"/>
-        </pc:sldMkLst>
-      </pc:sldChg>
-      <pc:sldChg chg="del">
-        <pc:chgData name="Simon Fong" userId="0989948daaec8292" providerId="LiveId" clId="{F12E0490-60F3-4147-9D04-93D87D41D5A0}" dt="2026-10-21T00:15:51.964" v="6200" actId="47"/>
-        <pc:sldMkLst>
-          <pc:docMk/>
-          <pc:sldMk cId="3040432693" sldId="318"/>
-        </pc:sldMkLst>
-      </pc:sldChg>
-      <pc:sldChg chg="del">
-        <pc:chgData name="Simon Fong" userId="0989948daaec8292" providerId="LiveId" clId="{F12E0490-60F3-4147-9D04-93D87D41D5A0}" dt="2026-10-21T00:15:53.010" v="6201" actId="47"/>
-        <pc:sldMkLst>
-          <pc:docMk/>
-          <pc:sldMk cId="3178247567" sldId="319"/>
-        </pc:sldMkLst>
-      </pc:sldChg>
-      <pc:sldChg chg="del">
-        <pc:chgData name="Simon Fong" userId="0989948daaec8292" providerId="LiveId" clId="{F12E0490-60F3-4147-9D04-93D87D41D5A0}" dt="2026-10-21T00:15:53.940" v="6202" actId="47"/>
-        <pc:sldMkLst>
-          <pc:docMk/>
-          <pc:sldMk cId="1051266353" sldId="320"/>
-        </pc:sldMkLst>
-      </pc:sldChg>
-      <pc:sldChg chg="del">
-        <pc:chgData name="Simon Fong" userId="0989948daaec8292" providerId="LiveId" clId="{F12E0490-60F3-4147-9D04-93D87D41D5A0}" dt="2026-10-21T00:15:54.842" v="6203" actId="47"/>
-        <pc:sldMkLst>
-          <pc:docMk/>
-          <pc:sldMk cId="3116010713" sldId="321"/>
-        </pc:sldMkLst>
-      </pc:sldChg>
-      <pc:sldChg chg="del">
-        <pc:chgData name="Simon Fong" userId="0989948daaec8292" providerId="LiveId" clId="{F12E0490-60F3-4147-9D04-93D87D41D5A0}" dt="2026-10-21T00:15:55.609" v="6204" actId="47"/>
-        <pc:sldMkLst>
-          <pc:docMk/>
-          <pc:sldMk cId="3774111530" sldId="322"/>
-        </pc:sldMkLst>
-      </pc:sldChg>
-      <pc:sldChg chg="del">
-        <pc:chgData name="Simon Fong" userId="0989948daaec8292" providerId="LiveId" clId="{F12E0490-60F3-4147-9D04-93D87D41D5A0}" dt="2026-10-21T00:15:56.781" v="6205" actId="47"/>
-        <pc:sldMkLst>
-          <pc:docMk/>
-          <pc:sldMk cId="168713412" sldId="323"/>
-        </pc:sldMkLst>
-      </pc:sldChg>
-      <pc:sldChg chg="del">
-        <pc:chgData name="Simon Fong" userId="0989948daaec8292" providerId="LiveId" clId="{F12E0490-60F3-4147-9D04-93D87D41D5A0}" dt="2026-10-21T00:15:43.591" v="6191" actId="47"/>
-        <pc:sldMkLst>
-          <pc:docMk/>
-          <pc:sldMk cId="1105254801" sldId="324"/>
-        </pc:sldMkLst>
-      </pc:sldChg>
-      <pc:sldChg chg="del">
-        <pc:chgData name="Simon Fong" userId="0989948daaec8292" providerId="LiveId" clId="{F12E0490-60F3-4147-9D04-93D87D41D5A0}" dt="2026-10-21T00:16:00.975" v="6206" actId="47"/>
-        <pc:sldMkLst>
-          <pc:docMk/>
-          <pc:sldMk cId="2202765662" sldId="325"/>
-        </pc:sldMkLst>
-      </pc:sldChg>
-      <pc:sldChg chg="modSp add del mod">
-        <pc:chgData name="Simon Fong" userId="0989948daaec8292" providerId="LiveId" clId="{F12E0490-60F3-4147-9D04-93D87D41D5A0}" dt="2026-10-21T16:06:14.539" v="11495" actId="47"/>
-        <pc:sldMkLst>
-          <pc:docMk/>
-          <pc:sldMk cId="2139981956" sldId="327"/>
-        </pc:sldMkLst>
-        <pc:spChg chg="mod">
-          <ac:chgData name="Simon Fong" userId="0989948daaec8292" providerId="LiveId" clId="{F12E0490-60F3-4147-9D04-93D87D41D5A0}" dt="2026-10-21T01:54:55.218" v="9059" actId="20577"/>
-          <ac:spMkLst>
-            <pc:docMk/>
-            <pc:sldMk cId="2139981956" sldId="327"/>
-            <ac:spMk id="7" creationId="{7E09983B-0D3F-4767-7BF1-6D71DA878A88}"/>
-          </ac:spMkLst>
-        </pc:spChg>
-      </pc:sldChg>
-      <pc:sldChg chg="addSp delSp modSp add del mod setBg modAnim">
-        <pc:chgData name="Simon Fong" userId="0989948daaec8292" providerId="LiveId" clId="{F12E0490-60F3-4147-9D04-93D87D41D5A0}" dt="2026-10-21T00:15:32.247" v="6185" actId="2696"/>
-        <pc:sldMkLst>
-          <pc:docMk/>
-          <pc:sldMk cId="2543258771" sldId="328"/>
-        </pc:sldMkLst>
-      </pc:sldChg>
-      <pc:sldChg chg="modSp add del setBg modAnim">
-        <pc:chgData name="Simon Fong" userId="0989948daaec8292" providerId="LiveId" clId="{F12E0490-60F3-4147-9D04-93D87D41D5A0}" dt="2026-10-21T00:15:37.994" v="6187" actId="2696"/>
-        <pc:sldMkLst>
-          <pc:docMk/>
-          <pc:sldMk cId="3602892923" sldId="329"/>
-        </pc:sldMkLst>
-      </pc:sldChg>
-      <pc:sldChg chg="addSp delSp modSp add del mod setBg modAnim">
-        <pc:chgData name="Simon Fong" userId="0989948daaec8292" providerId="LiveId" clId="{F12E0490-60F3-4147-9D04-93D87D41D5A0}" dt="2026-10-21T00:15:35.562" v="6186" actId="2696"/>
-        <pc:sldMkLst>
-          <pc:docMk/>
-          <pc:sldMk cId="1392044893" sldId="330"/>
-        </pc:sldMkLst>
       </pc:sldChg>
       <pc:sldChg chg="addSp delSp modSp add mod modTransition setBg addAnim delAnim modAnim modNotesTx">
         <pc:chgData name="Simon Fong" userId="0989948daaec8292" providerId="LiveId" clId="{F12E0490-60F3-4147-9D04-93D87D41D5A0}" dt="2026-10-22T01:38:37.227" v="12695"/>
@@ -426,1194 +218,6 @@
             <ac:picMk id="4" creationId="{DE7C1331-EFAD-8170-5D75-846B2AD91509}"/>
           </ac:picMkLst>
         </pc:picChg>
-        <pc:picChg chg="add del mod">
-          <ac:chgData name="Simon Fong" userId="0989948daaec8292" providerId="LiveId" clId="{F12E0490-60F3-4147-9D04-93D87D41D5A0}" dt="2026-10-21T23:28:22.808" v="11990" actId="478"/>
-          <ac:picMkLst>
-            <pc:docMk/>
-            <pc:sldMk cId="1681895122" sldId="331"/>
-            <ac:picMk id="10" creationId="{F3521340-72EE-8120-5F77-E4F77CBF9C68}"/>
-          </ac:picMkLst>
-        </pc:picChg>
-      </pc:sldChg>
-      <pc:sldChg chg="addSp delSp modSp add del mod modTransition setBg addAnim delAnim modAnim">
-        <pc:chgData name="Simon Fong" userId="0989948daaec8292" providerId="LiveId" clId="{F12E0490-60F3-4147-9D04-93D87D41D5A0}" dt="2026-10-21T23:23:04.901" v="11951" actId="47"/>
-        <pc:sldMkLst>
-          <pc:docMk/>
-          <pc:sldMk cId="4215080606" sldId="333"/>
-        </pc:sldMkLst>
-        <pc:spChg chg="add del">
-          <ac:chgData name="Simon Fong" userId="0989948daaec8292" providerId="LiveId" clId="{F12E0490-60F3-4147-9D04-93D87D41D5A0}" dt="2026-10-21T03:02:01.152" v="9203" actId="22"/>
-          <ac:spMkLst>
-            <pc:docMk/>
-            <pc:sldMk cId="4215080606" sldId="333"/>
-            <ac:spMk id="3" creationId="{591BAF78-434B-D696-1AE3-ED1BC22EECCC}"/>
-          </ac:spMkLst>
-        </pc:spChg>
-        <pc:spChg chg="mod">
-          <ac:chgData name="Simon Fong" userId="0989948daaec8292" providerId="LiveId" clId="{F12E0490-60F3-4147-9D04-93D87D41D5A0}" dt="2026-10-21T12:41:59.232" v="10694" actId="20577"/>
-          <ac:spMkLst>
-            <pc:docMk/>
-            <pc:sldMk cId="4215080606" sldId="333"/>
-            <ac:spMk id="5" creationId="{8F83ECEE-842B-5C7A-4B24-15265F3F8B3F}"/>
-          </ac:spMkLst>
-        </pc:spChg>
-        <pc:spChg chg="add mod">
-          <ac:chgData name="Simon Fong" userId="0989948daaec8292" providerId="LiveId" clId="{F12E0490-60F3-4147-9D04-93D87D41D5A0}" dt="2026-10-21T03:02:04.759" v="9205" actId="767"/>
-          <ac:spMkLst>
-            <pc:docMk/>
-            <pc:sldMk cId="4215080606" sldId="333"/>
-            <ac:spMk id="6" creationId="{EF492B55-2C98-A8AD-CB36-FB4A44485042}"/>
-          </ac:spMkLst>
-        </pc:spChg>
-        <pc:spChg chg="add del">
-          <ac:chgData name="Simon Fong" userId="0989948daaec8292" providerId="LiveId" clId="{F12E0490-60F3-4147-9D04-93D87D41D5A0}" dt="2026-10-21T03:02:14.614" v="9208" actId="22"/>
-          <ac:spMkLst>
-            <pc:docMk/>
-            <pc:sldMk cId="4215080606" sldId="333"/>
-            <ac:spMk id="8" creationId="{94D0F96A-9C28-78CF-0DD3-607CA5F742F6}"/>
-          </ac:spMkLst>
-        </pc:spChg>
-        <pc:spChg chg="mod">
-          <ac:chgData name="Simon Fong" userId="0989948daaec8292" providerId="LiveId" clId="{F12E0490-60F3-4147-9D04-93D87D41D5A0}" dt="2026-10-21T12:41:55.187" v="10693" actId="2085"/>
-          <ac:spMkLst>
-            <pc:docMk/>
-            <pc:sldMk cId="4215080606" sldId="333"/>
-            <ac:spMk id="21" creationId="{08F1DB40-8A87-06B1-26B9-4AFE6CDD26BD}"/>
-          </ac:spMkLst>
-        </pc:spChg>
-        <pc:picChg chg="mod modCrop">
-          <ac:chgData name="Simon Fong" userId="0989948daaec8292" providerId="LiveId" clId="{F12E0490-60F3-4147-9D04-93D87D41D5A0}" dt="2026-10-21T12:42:09.463" v="10695" actId="14100"/>
-          <ac:picMkLst>
-            <pc:docMk/>
-            <pc:sldMk cId="4215080606" sldId="333"/>
-            <ac:picMk id="10" creationId="{8F10A309-E41C-859A-65B4-82495C1240A6}"/>
-          </ac:picMkLst>
-        </pc:picChg>
-      </pc:sldChg>
-      <pc:sldChg chg="addSp delSp modSp add del mod modTransition addAnim delAnim modAnim">
-        <pc:chgData name="Simon Fong" userId="0989948daaec8292" providerId="LiveId" clId="{F12E0490-60F3-4147-9D04-93D87D41D5A0}" dt="2026-10-21T23:23:04.901" v="11951" actId="47"/>
-        <pc:sldMkLst>
-          <pc:docMk/>
-          <pc:sldMk cId="1266063993" sldId="335"/>
-        </pc:sldMkLst>
-        <pc:spChg chg="mod">
-          <ac:chgData name="Simon Fong" userId="0989948daaec8292" providerId="LiveId" clId="{F12E0490-60F3-4147-9D04-93D87D41D5A0}" dt="2026-10-21T12:42:39.741" v="10697" actId="20577"/>
-          <ac:spMkLst>
-            <pc:docMk/>
-            <pc:sldMk cId="1266063993" sldId="335"/>
-            <ac:spMk id="5" creationId="{113BDD0D-BF04-8D0A-B104-D2F482277D66}"/>
-          </ac:spMkLst>
-        </pc:spChg>
-        <pc:spChg chg="mod">
-          <ac:chgData name="Simon Fong" userId="0989948daaec8292" providerId="LiveId" clId="{F12E0490-60F3-4147-9D04-93D87D41D5A0}" dt="2026-10-21T12:42:36.416" v="10696" actId="2085"/>
-          <ac:spMkLst>
-            <pc:docMk/>
-            <pc:sldMk cId="1266063993" sldId="335"/>
-            <ac:spMk id="21" creationId="{EB4817D6-47CB-A5A2-9E37-8A167EFE3A0D}"/>
-          </ac:spMkLst>
-        </pc:spChg>
-        <pc:picChg chg="add mod">
-          <ac:chgData name="Simon Fong" userId="0989948daaec8292" providerId="LiveId" clId="{F12E0490-60F3-4147-9D04-93D87D41D5A0}" dt="2026-10-21T03:04:52.156" v="9273" actId="1076"/>
-          <ac:picMkLst>
-            <pc:docMk/>
-            <pc:sldMk cId="1266063993" sldId="335"/>
-            <ac:picMk id="3" creationId="{1C5C56BD-9398-C32E-CDFF-C169ECC400FF}"/>
-          </ac:picMkLst>
-        </pc:picChg>
-      </pc:sldChg>
-      <pc:sldChg chg="addSp modSp add del mod modTransition addAnim delAnim modAnim">
-        <pc:chgData name="Simon Fong" userId="0989948daaec8292" providerId="LiveId" clId="{F12E0490-60F3-4147-9D04-93D87D41D5A0}" dt="2026-10-21T23:23:04.901" v="11951" actId="47"/>
-        <pc:sldMkLst>
-          <pc:docMk/>
-          <pc:sldMk cId="1291358676" sldId="336"/>
-        </pc:sldMkLst>
-        <pc:spChg chg="mod">
-          <ac:chgData name="Simon Fong" userId="0989948daaec8292" providerId="LiveId" clId="{F12E0490-60F3-4147-9D04-93D87D41D5A0}" dt="2026-10-21T12:43:52.623" v="10705" actId="5793"/>
-          <ac:spMkLst>
-            <pc:docMk/>
-            <pc:sldMk cId="1291358676" sldId="336"/>
-            <ac:spMk id="5" creationId="{8A1C8B9D-53F5-4AC6-08AF-FF24D9E94558}"/>
-          </ac:spMkLst>
-        </pc:spChg>
-        <pc:spChg chg="mod">
-          <ac:chgData name="Simon Fong" userId="0989948daaec8292" providerId="LiveId" clId="{F12E0490-60F3-4147-9D04-93D87D41D5A0}" dt="2026-10-21T12:43:12.986" v="10698" actId="2085"/>
-          <ac:spMkLst>
-            <pc:docMk/>
-            <pc:sldMk cId="1291358676" sldId="336"/>
-            <ac:spMk id="21" creationId="{68585934-AEB4-1965-41C2-E43C6B54E0E7}"/>
-          </ac:spMkLst>
-        </pc:spChg>
-        <pc:picChg chg="mod">
-          <ac:chgData name="Simon Fong" userId="0989948daaec8292" providerId="LiveId" clId="{F12E0490-60F3-4147-9D04-93D87D41D5A0}" dt="2026-10-21T03:06:41.603" v="9307" actId="1038"/>
-          <ac:picMkLst>
-            <pc:docMk/>
-            <pc:sldMk cId="1291358676" sldId="336"/>
-            <ac:picMk id="3" creationId="{52B6C43A-49CF-5DAC-E54F-66426B5C80C6}"/>
-          </ac:picMkLst>
-        </pc:picChg>
-        <pc:picChg chg="add mod modCrop">
-          <ac:chgData name="Simon Fong" userId="0989948daaec8292" providerId="LiveId" clId="{F12E0490-60F3-4147-9D04-93D87D41D5A0}" dt="2026-10-21T00:06:28.544" v="5930" actId="14100"/>
-          <ac:picMkLst>
-            <pc:docMk/>
-            <pc:sldMk cId="1291358676" sldId="336"/>
-            <ac:picMk id="6" creationId="{A8E45675-76C8-86C4-14A7-58E8C907D1DB}"/>
-          </ac:picMkLst>
-        </pc:picChg>
-      </pc:sldChg>
-      <pc:sldChg chg="addSp delSp modSp add del mod modTransition addAnim delAnim modAnim">
-        <pc:chgData name="Simon Fong" userId="0989948daaec8292" providerId="LiveId" clId="{F12E0490-60F3-4147-9D04-93D87D41D5A0}" dt="2026-10-21T23:23:04.901" v="11951" actId="47"/>
-        <pc:sldMkLst>
-          <pc:docMk/>
-          <pc:sldMk cId="396072384" sldId="337"/>
-        </pc:sldMkLst>
-        <pc:spChg chg="mod">
-          <ac:chgData name="Simon Fong" userId="0989948daaec8292" providerId="LiveId" clId="{F12E0490-60F3-4147-9D04-93D87D41D5A0}" dt="2026-10-21T12:44:31.004" v="10707" actId="20577"/>
-          <ac:spMkLst>
-            <pc:docMk/>
-            <pc:sldMk cId="396072384" sldId="337"/>
-            <ac:spMk id="5" creationId="{8EC8DDD9-CC9F-AE93-960B-5B2FBC386262}"/>
-          </ac:spMkLst>
-        </pc:spChg>
-        <pc:spChg chg="mod">
-          <ac:chgData name="Simon Fong" userId="0989948daaec8292" providerId="LiveId" clId="{F12E0490-60F3-4147-9D04-93D87D41D5A0}" dt="2026-10-21T12:44:26.118" v="10706" actId="2085"/>
-          <ac:spMkLst>
-            <pc:docMk/>
-            <pc:sldMk cId="396072384" sldId="337"/>
-            <ac:spMk id="21" creationId="{5586E152-CCD5-3FEC-8843-C4801C9DC223}"/>
-          </ac:spMkLst>
-        </pc:spChg>
-        <pc:picChg chg="mod">
-          <ac:chgData name="Simon Fong" userId="0989948daaec8292" providerId="LiveId" clId="{F12E0490-60F3-4147-9D04-93D87D41D5A0}" dt="2026-10-21T03:08:24.725" v="9355" actId="1037"/>
-          <ac:picMkLst>
-            <pc:docMk/>
-            <pc:sldMk cId="396072384" sldId="337"/>
-            <ac:picMk id="3" creationId="{64E2470D-C606-3B08-AAD2-1EFFB9EC9667}"/>
-          </ac:picMkLst>
-        </pc:picChg>
-        <pc:picChg chg="del mod">
-          <ac:chgData name="Simon Fong" userId="0989948daaec8292" providerId="LiveId" clId="{F12E0490-60F3-4147-9D04-93D87D41D5A0}" dt="2026-10-21T00:07:36.816" v="5984" actId="478"/>
-          <ac:picMkLst>
-            <pc:docMk/>
-            <pc:sldMk cId="396072384" sldId="337"/>
-            <ac:picMk id="6" creationId="{E34EDDB3-4C33-212A-1978-327E3B24DAE6}"/>
-          </ac:picMkLst>
-        </pc:picChg>
-        <pc:picChg chg="add mod modCrop">
-          <ac:chgData name="Simon Fong" userId="0989948daaec8292" providerId="LiveId" clId="{F12E0490-60F3-4147-9D04-93D87D41D5A0}" dt="2026-10-21T12:44:39.277" v="10708" actId="1076"/>
-          <ac:picMkLst>
-            <pc:docMk/>
-            <pc:sldMk cId="396072384" sldId="337"/>
-            <ac:picMk id="7" creationId="{9FBBA423-E782-8B38-325A-A0247F37820A}"/>
-          </ac:picMkLst>
-        </pc:picChg>
-      </pc:sldChg>
-      <pc:sldChg chg="addSp delSp modSp add del mod modTransition addAnim delAnim modAnim">
-        <pc:chgData name="Simon Fong" userId="0989948daaec8292" providerId="LiveId" clId="{F12E0490-60F3-4147-9D04-93D87D41D5A0}" dt="2026-10-21T23:23:04.901" v="11951" actId="47"/>
-        <pc:sldMkLst>
-          <pc:docMk/>
-          <pc:sldMk cId="1375253281" sldId="338"/>
-        </pc:sldMkLst>
-        <pc:spChg chg="mod">
-          <ac:chgData name="Simon Fong" userId="0989948daaec8292" providerId="LiveId" clId="{F12E0490-60F3-4147-9D04-93D87D41D5A0}" dt="2026-10-21T12:45:03.431" v="10709" actId="20577"/>
-          <ac:spMkLst>
-            <pc:docMk/>
-            <pc:sldMk cId="1375253281" sldId="338"/>
-            <ac:spMk id="5" creationId="{008FEE48-14CF-C57B-A40D-F0338BE0C645}"/>
-          </ac:spMkLst>
-        </pc:spChg>
-        <pc:spChg chg="mod">
-          <ac:chgData name="Simon Fong" userId="0989948daaec8292" providerId="LiveId" clId="{F12E0490-60F3-4147-9D04-93D87D41D5A0}" dt="2026-10-21T12:40:21.840" v="10687" actId="2085"/>
-          <ac:spMkLst>
-            <pc:docMk/>
-            <pc:sldMk cId="1375253281" sldId="338"/>
-            <ac:spMk id="21" creationId="{61483E72-0219-AE89-5BAA-8939E1BBC388}"/>
-          </ac:spMkLst>
-        </pc:spChg>
-        <pc:picChg chg="mod">
-          <ac:chgData name="Simon Fong" userId="0989948daaec8292" providerId="LiveId" clId="{F12E0490-60F3-4147-9D04-93D87D41D5A0}" dt="2026-10-21T03:10:59.842" v="9389" actId="1038"/>
-          <ac:picMkLst>
-            <pc:docMk/>
-            <pc:sldMk cId="1375253281" sldId="338"/>
-            <ac:picMk id="3" creationId="{72DF8A30-44D2-CABB-8D0A-326E7AB65B23}"/>
-          </ac:picMkLst>
-        </pc:picChg>
-        <pc:picChg chg="add mod modCrop">
-          <ac:chgData name="Simon Fong" userId="0989948daaec8292" providerId="LiveId" clId="{F12E0490-60F3-4147-9D04-93D87D41D5A0}" dt="2026-10-21T12:45:09.624" v="10710" actId="1076"/>
-          <ac:picMkLst>
-            <pc:docMk/>
-            <pc:sldMk cId="1375253281" sldId="338"/>
-            <ac:picMk id="6" creationId="{0113398F-8067-9FCA-DFB9-D1306EC3AEB1}"/>
-          </ac:picMkLst>
-        </pc:picChg>
-        <pc:picChg chg="del">
-          <ac:chgData name="Simon Fong" userId="0989948daaec8292" providerId="LiveId" clId="{F12E0490-60F3-4147-9D04-93D87D41D5A0}" dt="2026-10-21T00:10:13.651" v="6073" actId="478"/>
-          <ac:picMkLst>
-            <pc:docMk/>
-            <pc:sldMk cId="1375253281" sldId="338"/>
-            <ac:picMk id="7" creationId="{D7D0E1C6-D4D6-E8AC-5163-1063C0E91BBE}"/>
-          </ac:picMkLst>
-        </pc:picChg>
-      </pc:sldChg>
-      <pc:sldChg chg="addSp delSp modSp add del mod modTransition addAnim delAnim modAnim">
-        <pc:chgData name="Simon Fong" userId="0989948daaec8292" providerId="LiveId" clId="{F12E0490-60F3-4147-9D04-93D87D41D5A0}" dt="2026-10-21T23:23:04.901" v="11951" actId="47"/>
-        <pc:sldMkLst>
-          <pc:docMk/>
-          <pc:sldMk cId="505333135" sldId="339"/>
-        </pc:sldMkLst>
-        <pc:spChg chg="mod">
-          <ac:chgData name="Simon Fong" userId="0989948daaec8292" providerId="LiveId" clId="{F12E0490-60F3-4147-9D04-93D87D41D5A0}" dt="2026-10-21T12:45:43.912" v="10713" actId="20577"/>
-          <ac:spMkLst>
-            <pc:docMk/>
-            <pc:sldMk cId="505333135" sldId="339"/>
-            <ac:spMk id="5" creationId="{B1D4E8BE-C650-FD61-99E2-FF1F0D3E3B41}"/>
-          </ac:spMkLst>
-        </pc:spChg>
-        <pc:spChg chg="mod">
-          <ac:chgData name="Simon Fong" userId="0989948daaec8292" providerId="LiveId" clId="{F12E0490-60F3-4147-9D04-93D87D41D5A0}" dt="2026-10-21T12:45:33.801" v="10711" actId="2085"/>
-          <ac:spMkLst>
-            <pc:docMk/>
-            <pc:sldMk cId="505333135" sldId="339"/>
-            <ac:spMk id="21" creationId="{28BC8D08-D16E-432D-6F4C-073B93A5E10F}"/>
-          </ac:spMkLst>
-        </pc:spChg>
-        <pc:picChg chg="mod">
-          <ac:chgData name="Simon Fong" userId="0989948daaec8292" providerId="LiveId" clId="{F12E0490-60F3-4147-9D04-93D87D41D5A0}" dt="2026-10-21T03:13:25.523" v="9426" actId="1038"/>
-          <ac:picMkLst>
-            <pc:docMk/>
-            <pc:sldMk cId="505333135" sldId="339"/>
-            <ac:picMk id="3" creationId="{07108D16-3AF3-F9D0-65BD-BACF91D127F8}"/>
-          </ac:picMkLst>
-        </pc:picChg>
-        <pc:picChg chg="del">
-          <ac:chgData name="Simon Fong" userId="0989948daaec8292" providerId="LiveId" clId="{F12E0490-60F3-4147-9D04-93D87D41D5A0}" dt="2026-10-21T00:11:38.446" v="6094" actId="478"/>
-          <ac:picMkLst>
-            <pc:docMk/>
-            <pc:sldMk cId="505333135" sldId="339"/>
-            <ac:picMk id="6" creationId="{9804ADE4-1FEE-6A60-9693-02E5E2067AB8}"/>
-          </ac:picMkLst>
-        </pc:picChg>
-        <pc:picChg chg="add mod modCrop">
-          <ac:chgData name="Simon Fong" userId="0989948daaec8292" providerId="LiveId" clId="{F12E0490-60F3-4147-9D04-93D87D41D5A0}" dt="2026-10-21T12:46:19.148" v="10730" actId="14100"/>
-          <ac:picMkLst>
-            <pc:docMk/>
-            <pc:sldMk cId="505333135" sldId="339"/>
-            <ac:picMk id="7" creationId="{A2F63EB2-4002-7F34-DC04-2F9F59A0E757}"/>
-          </ac:picMkLst>
-        </pc:picChg>
-      </pc:sldChg>
-      <pc:sldChg chg="addSp delSp modSp add del mod modTransition addAnim delAnim modAnim">
-        <pc:chgData name="Simon Fong" userId="0989948daaec8292" providerId="LiveId" clId="{F12E0490-60F3-4147-9D04-93D87D41D5A0}" dt="2026-10-21T23:23:04.901" v="11951" actId="47"/>
-        <pc:sldMkLst>
-          <pc:docMk/>
-          <pc:sldMk cId="1423773880" sldId="340"/>
-        </pc:sldMkLst>
-        <pc:spChg chg="mod">
-          <ac:chgData name="Simon Fong" userId="0989948daaec8292" providerId="LiveId" clId="{F12E0490-60F3-4147-9D04-93D87D41D5A0}" dt="2026-10-21T13:16:50.560" v="11075" actId="5793"/>
-          <ac:spMkLst>
-            <pc:docMk/>
-            <pc:sldMk cId="1423773880" sldId="340"/>
-            <ac:spMk id="5" creationId="{83B6B738-89C6-37DF-F851-AC887DEBD6E2}"/>
-          </ac:spMkLst>
-        </pc:spChg>
-        <pc:spChg chg="mod">
-          <ac:chgData name="Simon Fong" userId="0989948daaec8292" providerId="LiveId" clId="{F12E0490-60F3-4147-9D04-93D87D41D5A0}" dt="2026-10-21T12:48:09.659" v="10767" actId="2085"/>
-          <ac:spMkLst>
-            <pc:docMk/>
-            <pc:sldMk cId="1423773880" sldId="340"/>
-            <ac:spMk id="21" creationId="{1F6A02C4-B835-25CD-3465-07407040DC87}"/>
-          </ac:spMkLst>
-        </pc:spChg>
-        <pc:picChg chg="mod">
-          <ac:chgData name="Simon Fong" userId="0989948daaec8292" providerId="LiveId" clId="{F12E0490-60F3-4147-9D04-93D87D41D5A0}" dt="2026-10-21T03:16:50.175" v="9509" actId="1038"/>
-          <ac:picMkLst>
-            <pc:docMk/>
-            <pc:sldMk cId="1423773880" sldId="340"/>
-            <ac:picMk id="3" creationId="{CD1A1FB7-074D-D384-F826-BC2EADFC39C4}"/>
-          </ac:picMkLst>
-        </pc:picChg>
-        <pc:picChg chg="add del mod">
-          <ac:chgData name="Simon Fong" userId="0989948daaec8292" providerId="LiveId" clId="{F12E0490-60F3-4147-9D04-93D87D41D5A0}" dt="2026-10-21T00:17:25.052" v="6305" actId="478"/>
-          <ac:picMkLst>
-            <pc:docMk/>
-            <pc:sldMk cId="1423773880" sldId="340"/>
-            <ac:picMk id="6" creationId="{7DFB5EBC-5A32-60B9-6B6E-7733FC8DF021}"/>
-          </ac:picMkLst>
-        </pc:picChg>
-        <pc:picChg chg="del">
-          <ac:chgData name="Simon Fong" userId="0989948daaec8292" providerId="LiveId" clId="{F12E0490-60F3-4147-9D04-93D87D41D5A0}" dt="2026-10-21T00:16:24.014" v="6210" actId="478"/>
-          <ac:picMkLst>
-            <pc:docMk/>
-            <pc:sldMk cId="1423773880" sldId="340"/>
-            <ac:picMk id="7" creationId="{461C6E9C-8D81-57C8-2692-F9A6B3EC6907}"/>
-          </ac:picMkLst>
-        </pc:picChg>
-        <pc:picChg chg="add mod">
-          <ac:chgData name="Simon Fong" userId="0989948daaec8292" providerId="LiveId" clId="{F12E0490-60F3-4147-9D04-93D87D41D5A0}" dt="2026-10-21T03:16:50.175" v="9509" actId="1038"/>
-          <ac:picMkLst>
-            <pc:docMk/>
-            <pc:sldMk cId="1423773880" sldId="340"/>
-            <ac:picMk id="8" creationId="{97B57E45-01AE-4840-9C56-ADB244C5F89D}"/>
-          </ac:picMkLst>
-        </pc:picChg>
-      </pc:sldChg>
-      <pc:sldChg chg="addSp modSp add del mod modTransition addAnim delAnim modAnim">
-        <pc:chgData name="Simon Fong" userId="0989948daaec8292" providerId="LiveId" clId="{F12E0490-60F3-4147-9D04-93D87D41D5A0}" dt="2026-10-21T23:23:04.901" v="11951" actId="47"/>
-        <pc:sldMkLst>
-          <pc:docMk/>
-          <pc:sldMk cId="1129737174" sldId="341"/>
-        </pc:sldMkLst>
-        <pc:spChg chg="mod">
-          <ac:chgData name="Simon Fong" userId="0989948daaec8292" providerId="LiveId" clId="{F12E0490-60F3-4147-9D04-93D87D41D5A0}" dt="2026-10-21T12:50:43.345" v="10795" actId="207"/>
-          <ac:spMkLst>
-            <pc:docMk/>
-            <pc:sldMk cId="1129737174" sldId="341"/>
-            <ac:spMk id="5" creationId="{D7527AF6-7EB9-6468-B8E6-DAC566666A9A}"/>
-          </ac:spMkLst>
-        </pc:spChg>
-        <pc:spChg chg="mod">
-          <ac:chgData name="Simon Fong" userId="0989948daaec8292" providerId="LiveId" clId="{F12E0490-60F3-4147-9D04-93D87D41D5A0}" dt="2026-10-21T12:49:05.921" v="10774" actId="2085"/>
-          <ac:spMkLst>
-            <pc:docMk/>
-            <pc:sldMk cId="1129737174" sldId="341"/>
-            <ac:spMk id="21" creationId="{467D8542-FFE6-5BEE-B2CF-529F9384DDFB}"/>
-          </ac:spMkLst>
-        </pc:spChg>
-        <pc:picChg chg="mod">
-          <ac:chgData name="Simon Fong" userId="0989948daaec8292" providerId="LiveId" clId="{F12E0490-60F3-4147-9D04-93D87D41D5A0}" dt="2026-10-21T03:22:21.777" v="9654" actId="1037"/>
-          <ac:picMkLst>
-            <pc:docMk/>
-            <pc:sldMk cId="1129737174" sldId="341"/>
-            <ac:picMk id="3" creationId="{C2268DB0-4C54-E83D-E793-5A3C680489F5}"/>
-          </ac:picMkLst>
-        </pc:picChg>
-        <pc:picChg chg="add mod modCrop">
-          <ac:chgData name="Simon Fong" userId="0989948daaec8292" providerId="LiveId" clId="{F12E0490-60F3-4147-9D04-93D87D41D5A0}" dt="2026-10-21T12:48:56.700" v="10773" actId="1076"/>
-          <ac:picMkLst>
-            <pc:docMk/>
-            <pc:sldMk cId="1129737174" sldId="341"/>
-            <ac:picMk id="6" creationId="{C376D9BC-2384-ACB4-0A94-7B2FA96A5576}"/>
-          </ac:picMkLst>
-        </pc:picChg>
-        <pc:picChg chg="mod">
-          <ac:chgData name="Simon Fong" userId="0989948daaec8292" providerId="LiveId" clId="{F12E0490-60F3-4147-9D04-93D87D41D5A0}" dt="2026-10-21T03:22:21.777" v="9654" actId="1037"/>
-          <ac:picMkLst>
-            <pc:docMk/>
-            <pc:sldMk cId="1129737174" sldId="341"/>
-            <ac:picMk id="8" creationId="{00D3F2E8-FA83-3338-B00E-85F3936B99BA}"/>
-          </ac:picMkLst>
-        </pc:picChg>
-      </pc:sldChg>
-      <pc:sldChg chg="modSp add del mod modTransition addAnim delAnim modAnim">
-        <pc:chgData name="Simon Fong" userId="0989948daaec8292" providerId="LiveId" clId="{F12E0490-60F3-4147-9D04-93D87D41D5A0}" dt="2026-10-21T23:23:04.901" v="11951" actId="47"/>
-        <pc:sldMkLst>
-          <pc:docMk/>
-          <pc:sldMk cId="2851113903" sldId="342"/>
-        </pc:sldMkLst>
-        <pc:spChg chg="mod">
-          <ac:chgData name="Simon Fong" userId="0989948daaec8292" providerId="LiveId" clId="{F12E0490-60F3-4147-9D04-93D87D41D5A0}" dt="2026-10-21T12:51:50.883" v="10805" actId="20577"/>
-          <ac:spMkLst>
-            <pc:docMk/>
-            <pc:sldMk cId="2851113903" sldId="342"/>
-            <ac:spMk id="5" creationId="{3534F9FC-5B16-8099-A97F-F97DFE53C2E2}"/>
-          </ac:spMkLst>
-        </pc:spChg>
-        <pc:spChg chg="mod">
-          <ac:chgData name="Simon Fong" userId="0989948daaec8292" providerId="LiveId" clId="{F12E0490-60F3-4147-9D04-93D87D41D5A0}" dt="2026-10-21T12:53:13.173" v="10822" actId="2085"/>
-          <ac:spMkLst>
-            <pc:docMk/>
-            <pc:sldMk cId="2851113903" sldId="342"/>
-            <ac:spMk id="21" creationId="{771A0F6A-6020-9C29-BFAA-8BC2E7580412}"/>
-          </ac:spMkLst>
-        </pc:spChg>
-        <pc:picChg chg="mod">
-          <ac:chgData name="Simon Fong" userId="0989948daaec8292" providerId="LiveId" clId="{F12E0490-60F3-4147-9D04-93D87D41D5A0}" dt="2026-10-21T03:25:40.058" v="9722" actId="1038"/>
-          <ac:picMkLst>
-            <pc:docMk/>
-            <pc:sldMk cId="2851113903" sldId="342"/>
-            <ac:picMk id="3" creationId="{0FC74DE5-1CD4-F030-26B6-7789B3128B03}"/>
-          </ac:picMkLst>
-        </pc:picChg>
-        <pc:picChg chg="mod modCrop">
-          <ac:chgData name="Simon Fong" userId="0989948daaec8292" providerId="LiveId" clId="{F12E0490-60F3-4147-9D04-93D87D41D5A0}" dt="2026-10-21T00:31:00.854" v="6791" actId="1076"/>
-          <ac:picMkLst>
-            <pc:docMk/>
-            <pc:sldMk cId="2851113903" sldId="342"/>
-            <ac:picMk id="6" creationId="{0E5071E7-AB93-FF72-AEF1-60A82A307180}"/>
-          </ac:picMkLst>
-        </pc:picChg>
-        <pc:picChg chg="mod">
-          <ac:chgData name="Simon Fong" userId="0989948daaec8292" providerId="LiveId" clId="{F12E0490-60F3-4147-9D04-93D87D41D5A0}" dt="2026-10-21T03:25:40.058" v="9722" actId="1038"/>
-          <ac:picMkLst>
-            <pc:docMk/>
-            <pc:sldMk cId="2851113903" sldId="342"/>
-            <ac:picMk id="8" creationId="{280F33A7-3369-38B1-FBCD-ED6D23C4308E}"/>
-          </ac:picMkLst>
-        </pc:picChg>
-      </pc:sldChg>
-      <pc:sldChg chg="addSp delSp modSp add del mod modTransition addAnim delAnim modAnim">
-        <pc:chgData name="Simon Fong" userId="0989948daaec8292" providerId="LiveId" clId="{F12E0490-60F3-4147-9D04-93D87D41D5A0}" dt="2026-10-21T23:23:04.901" v="11951" actId="47"/>
-        <pc:sldMkLst>
-          <pc:docMk/>
-          <pc:sldMk cId="3076117219" sldId="343"/>
-        </pc:sldMkLst>
-        <pc:spChg chg="mod">
-          <ac:chgData name="Simon Fong" userId="0989948daaec8292" providerId="LiveId" clId="{F12E0490-60F3-4147-9D04-93D87D41D5A0}" dt="2026-10-21T12:55:22.581" v="10844" actId="207"/>
-          <ac:spMkLst>
-            <pc:docMk/>
-            <pc:sldMk cId="3076117219" sldId="343"/>
-            <ac:spMk id="5" creationId="{374F341D-FAA8-4F28-D001-25BD4EFE2BDA}"/>
-          </ac:spMkLst>
-        </pc:spChg>
-        <pc:spChg chg="mod">
-          <ac:chgData name="Simon Fong" userId="0989948daaec8292" providerId="LiveId" clId="{F12E0490-60F3-4147-9D04-93D87D41D5A0}" dt="2026-10-21T12:54:58.576" v="10842" actId="2085"/>
-          <ac:spMkLst>
-            <pc:docMk/>
-            <pc:sldMk cId="3076117219" sldId="343"/>
-            <ac:spMk id="21" creationId="{888AB290-26B6-7B31-A17F-96BB7A3068CE}"/>
-          </ac:spMkLst>
-        </pc:spChg>
-        <pc:picChg chg="mod">
-          <ac:chgData name="Simon Fong" userId="0989948daaec8292" providerId="LiveId" clId="{F12E0490-60F3-4147-9D04-93D87D41D5A0}" dt="2026-10-21T03:30:04.968" v="9800" actId="1037"/>
-          <ac:picMkLst>
-            <pc:docMk/>
-            <pc:sldMk cId="3076117219" sldId="343"/>
-            <ac:picMk id="3" creationId="{62AF3FED-C925-2B51-D9A7-7EB468310F54}"/>
-          </ac:picMkLst>
-        </pc:picChg>
-        <pc:picChg chg="del">
-          <ac:chgData name="Simon Fong" userId="0989948daaec8292" providerId="LiveId" clId="{F12E0490-60F3-4147-9D04-93D87D41D5A0}" dt="2026-10-21T00:33:53.313" v="6934" actId="478"/>
-          <ac:picMkLst>
-            <pc:docMk/>
-            <pc:sldMk cId="3076117219" sldId="343"/>
-            <ac:picMk id="6" creationId="{F65D134C-EA81-8FB9-71AB-E6DA305D4A49}"/>
-          </ac:picMkLst>
-        </pc:picChg>
-        <pc:picChg chg="add mod modCrop">
-          <ac:chgData name="Simon Fong" userId="0989948daaec8292" providerId="LiveId" clId="{F12E0490-60F3-4147-9D04-93D87D41D5A0}" dt="2026-10-21T12:54:18.031" v="10828" actId="14100"/>
-          <ac:picMkLst>
-            <pc:docMk/>
-            <pc:sldMk cId="3076117219" sldId="343"/>
-            <ac:picMk id="7" creationId="{0F5212E7-A56F-3EB9-C019-C98856B80384}"/>
-          </ac:picMkLst>
-        </pc:picChg>
-        <pc:picChg chg="mod">
-          <ac:chgData name="Simon Fong" userId="0989948daaec8292" providerId="LiveId" clId="{F12E0490-60F3-4147-9D04-93D87D41D5A0}" dt="2026-10-21T03:30:04.968" v="9800" actId="1037"/>
-          <ac:picMkLst>
-            <pc:docMk/>
-            <pc:sldMk cId="3076117219" sldId="343"/>
-            <ac:picMk id="8" creationId="{7E4869ED-D38E-635E-DCA9-ACFC057E20A4}"/>
-          </ac:picMkLst>
-        </pc:picChg>
-      </pc:sldChg>
-      <pc:sldChg chg="modSp add del mod modTransition addAnim delAnim modAnim">
-        <pc:chgData name="Simon Fong" userId="0989948daaec8292" providerId="LiveId" clId="{F12E0490-60F3-4147-9D04-93D87D41D5A0}" dt="2026-10-21T23:23:04.901" v="11951" actId="47"/>
-        <pc:sldMkLst>
-          <pc:docMk/>
-          <pc:sldMk cId="673011083" sldId="344"/>
-        </pc:sldMkLst>
-        <pc:spChg chg="mod">
-          <ac:chgData name="Simon Fong" userId="0989948daaec8292" providerId="LiveId" clId="{F12E0490-60F3-4147-9D04-93D87D41D5A0}" dt="2026-10-21T13:18:14.529" v="11078" actId="20577"/>
-          <ac:spMkLst>
-            <pc:docMk/>
-            <pc:sldMk cId="673011083" sldId="344"/>
-            <ac:spMk id="5" creationId="{B18773E1-E697-BAA3-558F-F73F5F8F252E}"/>
-          </ac:spMkLst>
-        </pc:spChg>
-        <pc:spChg chg="mod">
-          <ac:chgData name="Simon Fong" userId="0989948daaec8292" providerId="LiveId" clId="{F12E0490-60F3-4147-9D04-93D87D41D5A0}" dt="2026-10-21T13:18:11.479" v="11077" actId="2085"/>
-          <ac:spMkLst>
-            <pc:docMk/>
-            <pc:sldMk cId="673011083" sldId="344"/>
-            <ac:spMk id="21" creationId="{24C28F24-7BCA-A079-3E94-D43ECE497174}"/>
-          </ac:spMkLst>
-        </pc:spChg>
-        <pc:picChg chg="mod">
-          <ac:chgData name="Simon Fong" userId="0989948daaec8292" providerId="LiveId" clId="{F12E0490-60F3-4147-9D04-93D87D41D5A0}" dt="2026-10-21T03:32:37.511" v="9868" actId="1038"/>
-          <ac:picMkLst>
-            <pc:docMk/>
-            <pc:sldMk cId="673011083" sldId="344"/>
-            <ac:picMk id="3" creationId="{70D97C37-060C-5399-1EC2-902FF9390000}"/>
-          </ac:picMkLst>
-        </pc:picChg>
-        <pc:picChg chg="mod modCrop">
-          <ac:chgData name="Simon Fong" userId="0989948daaec8292" providerId="LiveId" clId="{F12E0490-60F3-4147-9D04-93D87D41D5A0}" dt="2026-10-21T13:18:18.563" v="11079" actId="1076"/>
-          <ac:picMkLst>
-            <pc:docMk/>
-            <pc:sldMk cId="673011083" sldId="344"/>
-            <ac:picMk id="7" creationId="{DA20B343-23A5-D59E-20E4-188E4A76C18E}"/>
-          </ac:picMkLst>
-        </pc:picChg>
-        <pc:picChg chg="mod">
-          <ac:chgData name="Simon Fong" userId="0989948daaec8292" providerId="LiveId" clId="{F12E0490-60F3-4147-9D04-93D87D41D5A0}" dt="2026-10-21T03:32:37.511" v="9868" actId="1038"/>
-          <ac:picMkLst>
-            <pc:docMk/>
-            <pc:sldMk cId="673011083" sldId="344"/>
-            <ac:picMk id="8" creationId="{1452368B-EB2C-AA30-48FF-8A843D0B28A6}"/>
-          </ac:picMkLst>
-        </pc:picChg>
-      </pc:sldChg>
-      <pc:sldChg chg="addSp delSp modSp add del mod ord modTransition addAnim delAnim modAnim modNotesTx">
-        <pc:chgData name="Simon Fong" userId="0989948daaec8292" providerId="LiveId" clId="{F12E0490-60F3-4147-9D04-93D87D41D5A0}" dt="2026-10-21T23:23:04.901" v="11951" actId="47"/>
-        <pc:sldMkLst>
-          <pc:docMk/>
-          <pc:sldMk cId="2281329578" sldId="345"/>
-        </pc:sldMkLst>
-        <pc:spChg chg="mod">
-          <ac:chgData name="Simon Fong" userId="0989948daaec8292" providerId="LiveId" clId="{F12E0490-60F3-4147-9D04-93D87D41D5A0}" dt="2026-10-21T12:57:04.513" v="10872" actId="20577"/>
-          <ac:spMkLst>
-            <pc:docMk/>
-            <pc:sldMk cId="2281329578" sldId="345"/>
-            <ac:spMk id="5" creationId="{5EC7EF24-09D1-07E9-A675-ACFE9F99F71D}"/>
-          </ac:spMkLst>
-        </pc:spChg>
-        <pc:spChg chg="mod">
-          <ac:chgData name="Simon Fong" userId="0989948daaec8292" providerId="LiveId" clId="{F12E0490-60F3-4147-9D04-93D87D41D5A0}" dt="2026-10-21T12:56:34.427" v="10862" actId="2085"/>
-          <ac:spMkLst>
-            <pc:docMk/>
-            <pc:sldMk cId="2281329578" sldId="345"/>
-            <ac:spMk id="21" creationId="{819C928A-6012-D24B-69F0-B535B6D7D255}"/>
-          </ac:spMkLst>
-        </pc:spChg>
-        <pc:picChg chg="mod">
-          <ac:chgData name="Simon Fong" userId="0989948daaec8292" providerId="LiveId" clId="{F12E0490-60F3-4147-9D04-93D87D41D5A0}" dt="2026-10-21T03:34:42.062" v="9928" actId="1038"/>
-          <ac:picMkLst>
-            <pc:docMk/>
-            <pc:sldMk cId="2281329578" sldId="345"/>
-            <ac:picMk id="3" creationId="{BC3F6471-9A9C-796A-4CB1-543C5ECDD3FE}"/>
-          </ac:picMkLst>
-        </pc:picChg>
-        <pc:picChg chg="add del">
-          <ac:chgData name="Simon Fong" userId="0989948daaec8292" providerId="LiveId" clId="{F12E0490-60F3-4147-9D04-93D87D41D5A0}" dt="2026-10-21T00:39:49.828" v="7041" actId="22"/>
-          <ac:picMkLst>
-            <pc:docMk/>
-            <pc:sldMk cId="2281329578" sldId="345"/>
-            <ac:picMk id="6" creationId="{ECD6B820-D9C2-EF60-1D3F-745F0396A26A}"/>
-          </ac:picMkLst>
-        </pc:picChg>
-        <pc:picChg chg="add mod">
-          <ac:chgData name="Simon Fong" userId="0989948daaec8292" providerId="LiveId" clId="{F12E0490-60F3-4147-9D04-93D87D41D5A0}" dt="2026-10-21T03:34:42.062" v="9928" actId="1038"/>
-          <ac:picMkLst>
-            <pc:docMk/>
-            <pc:sldMk cId="2281329578" sldId="345"/>
-            <ac:picMk id="7" creationId="{5EB20360-B5C2-C91A-B972-A0B6E6A0676D}"/>
-          </ac:picMkLst>
-        </pc:picChg>
-        <pc:picChg chg="mod">
-          <ac:chgData name="Simon Fong" userId="0989948daaec8292" providerId="LiveId" clId="{F12E0490-60F3-4147-9D04-93D87D41D5A0}" dt="2026-10-21T03:34:42.062" v="9928" actId="1038"/>
-          <ac:picMkLst>
-            <pc:docMk/>
-            <pc:sldMk cId="2281329578" sldId="345"/>
-            <ac:picMk id="8" creationId="{7832668A-C6AD-E2BD-C600-17AD3DD84BCD}"/>
-          </ac:picMkLst>
-        </pc:picChg>
-      </pc:sldChg>
-      <pc:sldChg chg="addSp modSp add del mod modTransition addAnim delAnim modAnim">
-        <pc:chgData name="Simon Fong" userId="0989948daaec8292" providerId="LiveId" clId="{F12E0490-60F3-4147-9D04-93D87D41D5A0}" dt="2026-10-21T23:23:04.901" v="11951" actId="47"/>
-        <pc:sldMkLst>
-          <pc:docMk/>
-          <pc:sldMk cId="15008574" sldId="346"/>
-        </pc:sldMkLst>
-        <pc:spChg chg="mod">
-          <ac:chgData name="Simon Fong" userId="0989948daaec8292" providerId="LiveId" clId="{F12E0490-60F3-4147-9D04-93D87D41D5A0}" dt="2026-10-21T12:57:28.138" v="10875" actId="20577"/>
-          <ac:spMkLst>
-            <pc:docMk/>
-            <pc:sldMk cId="15008574" sldId="346"/>
-            <ac:spMk id="5" creationId="{BB2135E3-4197-4D00-88AC-0F0CBEDA9DD8}"/>
-          </ac:spMkLst>
-        </pc:spChg>
-        <pc:spChg chg="mod">
-          <ac:chgData name="Simon Fong" userId="0989948daaec8292" providerId="LiveId" clId="{F12E0490-60F3-4147-9D04-93D87D41D5A0}" dt="2026-10-21T12:57:23.491" v="10874" actId="2085"/>
-          <ac:spMkLst>
-            <pc:docMk/>
-            <pc:sldMk cId="15008574" sldId="346"/>
-            <ac:spMk id="21" creationId="{3D46AA4F-F164-1948-3F88-DCBFCFE15BBF}"/>
-          </ac:spMkLst>
-        </pc:spChg>
-        <pc:picChg chg="mod">
-          <ac:chgData name="Simon Fong" userId="0989948daaec8292" providerId="LiveId" clId="{F12E0490-60F3-4147-9D04-93D87D41D5A0}" dt="2026-10-21T03:37:18.068" v="10025" actId="1038"/>
-          <ac:picMkLst>
-            <pc:docMk/>
-            <pc:sldMk cId="15008574" sldId="346"/>
-            <ac:picMk id="3" creationId="{C9C1C30C-4713-8C94-CB2C-12E67E891F67}"/>
-          </ac:picMkLst>
-        </pc:picChg>
-        <pc:picChg chg="add mod modCrop">
-          <ac:chgData name="Simon Fong" userId="0989948daaec8292" providerId="LiveId" clId="{F12E0490-60F3-4147-9D04-93D87D41D5A0}" dt="2026-10-21T12:57:40.759" v="10877" actId="1076"/>
-          <ac:picMkLst>
-            <pc:docMk/>
-            <pc:sldMk cId="15008574" sldId="346"/>
-            <ac:picMk id="6" creationId="{3C3D41F4-EC5E-2025-0DF8-FB621BBB3295}"/>
-          </ac:picMkLst>
-        </pc:picChg>
-        <pc:picChg chg="mod">
-          <ac:chgData name="Simon Fong" userId="0989948daaec8292" providerId="LiveId" clId="{F12E0490-60F3-4147-9D04-93D87D41D5A0}" dt="2026-10-21T03:37:18.068" v="10025" actId="1038"/>
-          <ac:picMkLst>
-            <pc:docMk/>
-            <pc:sldMk cId="15008574" sldId="346"/>
-            <ac:picMk id="7" creationId="{23393959-E4D7-C207-0AD9-9AEA54BA0F20}"/>
-          </ac:picMkLst>
-        </pc:picChg>
-        <pc:picChg chg="mod">
-          <ac:chgData name="Simon Fong" userId="0989948daaec8292" providerId="LiveId" clId="{F12E0490-60F3-4147-9D04-93D87D41D5A0}" dt="2026-10-21T03:37:18.068" v="10025" actId="1038"/>
-          <ac:picMkLst>
-            <pc:docMk/>
-            <pc:sldMk cId="15008574" sldId="346"/>
-            <ac:picMk id="8" creationId="{EC7AC0CB-4B67-4AE0-394B-A7E062973BB6}"/>
-          </ac:picMkLst>
-        </pc:picChg>
-      </pc:sldChg>
-      <pc:sldChg chg="addSp delSp modSp add del mod modTransition addAnim delAnim modAnim">
-        <pc:chgData name="Simon Fong" userId="0989948daaec8292" providerId="LiveId" clId="{F12E0490-60F3-4147-9D04-93D87D41D5A0}" dt="2026-10-21T23:23:04.901" v="11951" actId="47"/>
-        <pc:sldMkLst>
-          <pc:docMk/>
-          <pc:sldMk cId="1132955163" sldId="347"/>
-        </pc:sldMkLst>
-        <pc:spChg chg="mod">
-          <ac:chgData name="Simon Fong" userId="0989948daaec8292" providerId="LiveId" clId="{F12E0490-60F3-4147-9D04-93D87D41D5A0}" dt="2026-10-21T12:59:43.893" v="10902" actId="20577"/>
-          <ac:spMkLst>
-            <pc:docMk/>
-            <pc:sldMk cId="1132955163" sldId="347"/>
-            <ac:spMk id="5" creationId="{C3177B20-FA5E-288D-B5DF-5FC6921A267B}"/>
-          </ac:spMkLst>
-        </pc:spChg>
-        <pc:spChg chg="add del">
-          <ac:chgData name="Simon Fong" userId="0989948daaec8292" providerId="LiveId" clId="{F12E0490-60F3-4147-9D04-93D87D41D5A0}" dt="2026-10-21T00:59:53.080" v="7401" actId="22"/>
-          <ac:spMkLst>
-            <pc:docMk/>
-            <pc:sldMk cId="1132955163" sldId="347"/>
-            <ac:spMk id="9" creationId="{D56ED7A4-3821-7C3C-49E6-1EF1EA4463D0}"/>
-          </ac:spMkLst>
-        </pc:spChg>
-        <pc:spChg chg="add mod">
-          <ac:chgData name="Simon Fong" userId="0989948daaec8292" providerId="LiveId" clId="{F12E0490-60F3-4147-9D04-93D87D41D5A0}" dt="2026-10-21T01:16:34.868" v="7670" actId="164"/>
-          <ac:spMkLst>
-            <pc:docMk/>
-            <pc:sldMk cId="1132955163" sldId="347"/>
-            <ac:spMk id="19" creationId="{68544943-D2EC-B93C-A57B-97C2CCC570C4}"/>
-          </ac:spMkLst>
-        </pc:spChg>
-        <pc:spChg chg="mod">
-          <ac:chgData name="Simon Fong" userId="0989948daaec8292" providerId="LiveId" clId="{F12E0490-60F3-4147-9D04-93D87D41D5A0}" dt="2026-10-21T12:59:40.307" v="10901" actId="2085"/>
-          <ac:spMkLst>
-            <pc:docMk/>
-            <pc:sldMk cId="1132955163" sldId="347"/>
-            <ac:spMk id="21" creationId="{D854AA77-4144-0C37-D17D-49C7EF64E46D}"/>
-          </ac:spMkLst>
-        </pc:spChg>
-        <pc:spChg chg="add mod">
-          <ac:chgData name="Simon Fong" userId="0989948daaec8292" providerId="LiveId" clId="{F12E0490-60F3-4147-9D04-93D87D41D5A0}" dt="2026-10-21T01:16:34.868" v="7670" actId="164"/>
-          <ac:spMkLst>
-            <pc:docMk/>
-            <pc:sldMk cId="1132955163" sldId="347"/>
-            <ac:spMk id="22" creationId="{6A7DC837-68DE-2683-0328-DFADA0AD0575}"/>
-          </ac:spMkLst>
-        </pc:spChg>
-        <pc:spChg chg="add mod">
-          <ac:chgData name="Simon Fong" userId="0989948daaec8292" providerId="LiveId" clId="{F12E0490-60F3-4147-9D04-93D87D41D5A0}" dt="2026-10-21T01:16:34.868" v="7670" actId="164"/>
-          <ac:spMkLst>
-            <pc:docMk/>
-            <pc:sldMk cId="1132955163" sldId="347"/>
-            <ac:spMk id="24" creationId="{983B1CAD-8D21-A149-6EA8-DADE0533D0FE}"/>
-          </ac:spMkLst>
-        </pc:spChg>
-        <pc:grpChg chg="add mod">
-          <ac:chgData name="Simon Fong" userId="0989948daaec8292" providerId="LiveId" clId="{F12E0490-60F3-4147-9D04-93D87D41D5A0}" dt="2026-10-21T01:16:26.717" v="7669" actId="164"/>
-          <ac:grpSpMkLst>
-            <pc:docMk/>
-            <pc:sldMk cId="1132955163" sldId="347"/>
-            <ac:grpSpMk id="26" creationId="{C062F457-9B80-36D5-E12B-26B318CFE729}"/>
-          </ac:grpSpMkLst>
-        </pc:grpChg>
-        <pc:grpChg chg="add mod">
-          <ac:chgData name="Simon Fong" userId="0989948daaec8292" providerId="LiveId" clId="{F12E0490-60F3-4147-9D04-93D87D41D5A0}" dt="2026-10-21T01:16:37.696" v="7678" actId="1037"/>
-          <ac:grpSpMkLst>
-            <pc:docMk/>
-            <pc:sldMk cId="1132955163" sldId="347"/>
-            <ac:grpSpMk id="27" creationId="{5526A8F9-2764-7D70-6D55-DAF86557706A}"/>
-          </ac:grpSpMkLst>
-        </pc:grpChg>
-        <pc:picChg chg="mod">
-          <ac:chgData name="Simon Fong" userId="0989948daaec8292" providerId="LiveId" clId="{F12E0490-60F3-4147-9D04-93D87D41D5A0}" dt="2026-10-21T03:44:12.832" v="10188" actId="1038"/>
-          <ac:picMkLst>
-            <pc:docMk/>
-            <pc:sldMk cId="1132955163" sldId="347"/>
-            <ac:picMk id="3" creationId="{704F9162-1995-0B33-DE0C-A591DD97D287}"/>
-          </ac:picMkLst>
-        </pc:picChg>
-        <pc:picChg chg="del">
-          <ac:chgData name="Simon Fong" userId="0989948daaec8292" providerId="LiveId" clId="{F12E0490-60F3-4147-9D04-93D87D41D5A0}" dt="2026-10-21T00:58:17.025" v="7363" actId="478"/>
-          <ac:picMkLst>
-            <pc:docMk/>
-            <pc:sldMk cId="1132955163" sldId="347"/>
-            <ac:picMk id="6" creationId="{A3B022F2-2AB9-2DC6-641B-C2C2D813D41C}"/>
-          </ac:picMkLst>
-        </pc:picChg>
-        <pc:picChg chg="mod">
-          <ac:chgData name="Simon Fong" userId="0989948daaec8292" providerId="LiveId" clId="{F12E0490-60F3-4147-9D04-93D87D41D5A0}" dt="2026-10-21T03:44:12.832" v="10188" actId="1038"/>
-          <ac:picMkLst>
-            <pc:docMk/>
-            <pc:sldMk cId="1132955163" sldId="347"/>
-            <ac:picMk id="7" creationId="{59F01B04-41F8-F625-1C91-FF86C48281F5}"/>
-          </ac:picMkLst>
-        </pc:picChg>
-        <pc:picChg chg="mod">
-          <ac:chgData name="Simon Fong" userId="0989948daaec8292" providerId="LiveId" clId="{F12E0490-60F3-4147-9D04-93D87D41D5A0}" dt="2026-10-21T03:44:12.832" v="10188" actId="1038"/>
-          <ac:picMkLst>
-            <pc:docMk/>
-            <pc:sldMk cId="1132955163" sldId="347"/>
-            <ac:picMk id="8" creationId="{CC721F2E-B171-A076-89CF-615FB09DA274}"/>
-          </ac:picMkLst>
-        </pc:picChg>
-        <pc:picChg chg="add mod modCrop">
-          <ac:chgData name="Simon Fong" userId="0989948daaec8292" providerId="LiveId" clId="{F12E0490-60F3-4147-9D04-93D87D41D5A0}" dt="2026-10-21T01:16:34.868" v="7670" actId="164"/>
-          <ac:picMkLst>
-            <pc:docMk/>
-            <pc:sldMk cId="1132955163" sldId="347"/>
-            <ac:picMk id="11" creationId="{CBA88B55-B3BB-2877-D36F-D729C82DF402}"/>
-          </ac:picMkLst>
-        </pc:picChg>
-        <pc:picChg chg="add mod">
-          <ac:chgData name="Simon Fong" userId="0989948daaec8292" providerId="LiveId" clId="{F12E0490-60F3-4147-9D04-93D87D41D5A0}" dt="2026-10-21T01:16:34.868" v="7670" actId="164"/>
-          <ac:picMkLst>
-            <pc:docMk/>
-            <pc:sldMk cId="1132955163" sldId="347"/>
-            <ac:picMk id="13" creationId="{105F281D-68B5-C7BD-387C-07F6C13CA784}"/>
-          </ac:picMkLst>
-        </pc:picChg>
-        <pc:picChg chg="add mod">
-          <ac:chgData name="Simon Fong" userId="0989948daaec8292" providerId="LiveId" clId="{F12E0490-60F3-4147-9D04-93D87D41D5A0}" dt="2026-10-21T01:16:34.868" v="7670" actId="164"/>
-          <ac:picMkLst>
-            <pc:docMk/>
-            <pc:sldMk cId="1132955163" sldId="347"/>
-            <ac:picMk id="15" creationId="{16EAD7C6-27C0-65CB-C043-1F082D593A3D}"/>
-          </ac:picMkLst>
-        </pc:picChg>
-        <pc:cxnChg chg="add mod">
-          <ac:chgData name="Simon Fong" userId="0989948daaec8292" providerId="LiveId" clId="{F12E0490-60F3-4147-9D04-93D87D41D5A0}" dt="2026-10-21T01:16:34.868" v="7670" actId="164"/>
-          <ac:cxnSpMkLst>
-            <pc:docMk/>
-            <pc:sldMk cId="1132955163" sldId="347"/>
-            <ac:cxnSpMk id="17" creationId="{4B5BFCB6-2529-21EC-8304-0AE189D1F640}"/>
-          </ac:cxnSpMkLst>
-        </pc:cxnChg>
-        <pc:cxnChg chg="add mod">
-          <ac:chgData name="Simon Fong" userId="0989948daaec8292" providerId="LiveId" clId="{F12E0490-60F3-4147-9D04-93D87D41D5A0}" dt="2026-10-21T01:16:34.868" v="7670" actId="164"/>
-          <ac:cxnSpMkLst>
-            <pc:docMk/>
-            <pc:sldMk cId="1132955163" sldId="347"/>
-            <ac:cxnSpMk id="18" creationId="{112A3DD8-B277-02B8-A1F0-14BFEAB665E8}"/>
-          </ac:cxnSpMkLst>
-        </pc:cxnChg>
-      </pc:sldChg>
-      <pc:sldChg chg="addSp delSp modSp add del mod modTransition addAnim delAnim modAnim">
-        <pc:chgData name="Simon Fong" userId="0989948daaec8292" providerId="LiveId" clId="{F12E0490-60F3-4147-9D04-93D87D41D5A0}" dt="2026-10-21T23:23:04.901" v="11951" actId="47"/>
-        <pc:sldMkLst>
-          <pc:docMk/>
-          <pc:sldMk cId="944892801" sldId="348"/>
-        </pc:sldMkLst>
-        <pc:spChg chg="mod">
-          <ac:chgData name="Simon Fong" userId="0989948daaec8292" providerId="LiveId" clId="{F12E0490-60F3-4147-9D04-93D87D41D5A0}" dt="2026-10-21T13:01:41.185" v="10923" actId="20577"/>
-          <ac:spMkLst>
-            <pc:docMk/>
-            <pc:sldMk cId="944892801" sldId="348"/>
-            <ac:spMk id="5" creationId="{0EB6E484-19CC-C114-9DEE-B0273D5D8E11}"/>
-          </ac:spMkLst>
-        </pc:spChg>
-        <pc:spChg chg="del">
-          <ac:chgData name="Simon Fong" userId="0989948daaec8292" providerId="LiveId" clId="{F12E0490-60F3-4147-9D04-93D87D41D5A0}" dt="2026-10-21T01:16:53.745" v="7679" actId="478"/>
-          <ac:spMkLst>
-            <pc:docMk/>
-            <pc:sldMk cId="944892801" sldId="348"/>
-            <ac:spMk id="19" creationId="{212E7FC7-0C3A-4D9D-FB54-2209C3EC9548}"/>
-          </ac:spMkLst>
-        </pc:spChg>
-        <pc:spChg chg="mod">
-          <ac:chgData name="Simon Fong" userId="0989948daaec8292" providerId="LiveId" clId="{F12E0490-60F3-4147-9D04-93D87D41D5A0}" dt="2026-10-21T13:02:06.422" v="10936" actId="2085"/>
-          <ac:spMkLst>
-            <pc:docMk/>
-            <pc:sldMk cId="944892801" sldId="348"/>
-            <ac:spMk id="21" creationId="{352C6DE9-F32F-7217-21DA-18494A14E2B8}"/>
-          </ac:spMkLst>
-        </pc:spChg>
-        <pc:spChg chg="del">
-          <ac:chgData name="Simon Fong" userId="0989948daaec8292" providerId="LiveId" clId="{F12E0490-60F3-4147-9D04-93D87D41D5A0}" dt="2026-10-21T01:16:53.745" v="7679" actId="478"/>
-          <ac:spMkLst>
-            <pc:docMk/>
-            <pc:sldMk cId="944892801" sldId="348"/>
-            <ac:spMk id="22" creationId="{AAE13F48-738B-9EA0-E55D-989A1284F9B6}"/>
-          </ac:spMkLst>
-        </pc:spChg>
-        <pc:spChg chg="del">
-          <ac:chgData name="Simon Fong" userId="0989948daaec8292" providerId="LiveId" clId="{F12E0490-60F3-4147-9D04-93D87D41D5A0}" dt="2026-10-21T01:16:53.745" v="7679" actId="478"/>
-          <ac:spMkLst>
-            <pc:docMk/>
-            <pc:sldMk cId="944892801" sldId="348"/>
-            <ac:spMk id="24" creationId="{DD2192DC-8BD1-E46C-D2AD-4ED5A2385799}"/>
-          </ac:spMkLst>
-        </pc:spChg>
-        <pc:picChg chg="mod">
-          <ac:chgData name="Simon Fong" userId="0989948daaec8292" providerId="LiveId" clId="{F12E0490-60F3-4147-9D04-93D87D41D5A0}" dt="2026-10-21T03:44:33.479" v="10219" actId="1038"/>
-          <ac:picMkLst>
-            <pc:docMk/>
-            <pc:sldMk cId="944892801" sldId="348"/>
-            <ac:picMk id="3" creationId="{DB32175A-03E9-A495-9170-7C06455B5E2E}"/>
-          </ac:picMkLst>
-        </pc:picChg>
-        <pc:picChg chg="add mod modCrop">
-          <ac:chgData name="Simon Fong" userId="0989948daaec8292" providerId="LiveId" clId="{F12E0490-60F3-4147-9D04-93D87D41D5A0}" dt="2026-10-21T13:01:43.731" v="10924" actId="1076"/>
-          <ac:picMkLst>
-            <pc:docMk/>
-            <pc:sldMk cId="944892801" sldId="348"/>
-            <ac:picMk id="6" creationId="{C16D32A4-D9BD-E7A7-32E6-1921C045B9D2}"/>
-          </ac:picMkLst>
-        </pc:picChg>
-        <pc:picChg chg="mod">
-          <ac:chgData name="Simon Fong" userId="0989948daaec8292" providerId="LiveId" clId="{F12E0490-60F3-4147-9D04-93D87D41D5A0}" dt="2026-10-21T03:44:33.479" v="10219" actId="1038"/>
-          <ac:picMkLst>
-            <pc:docMk/>
-            <pc:sldMk cId="944892801" sldId="348"/>
-            <ac:picMk id="7" creationId="{F2F690CF-6139-D0E8-8962-6AC792631D19}"/>
-          </ac:picMkLst>
-        </pc:picChg>
-        <pc:picChg chg="mod">
-          <ac:chgData name="Simon Fong" userId="0989948daaec8292" providerId="LiveId" clId="{F12E0490-60F3-4147-9D04-93D87D41D5A0}" dt="2026-10-21T03:44:33.479" v="10219" actId="1038"/>
-          <ac:picMkLst>
-            <pc:docMk/>
-            <pc:sldMk cId="944892801" sldId="348"/>
-            <ac:picMk id="8" creationId="{F62D9AFC-ED56-E949-DE18-FFCFB6C858DE}"/>
-          </ac:picMkLst>
-        </pc:picChg>
-        <pc:picChg chg="del">
-          <ac:chgData name="Simon Fong" userId="0989948daaec8292" providerId="LiveId" clId="{F12E0490-60F3-4147-9D04-93D87D41D5A0}" dt="2026-10-21T01:16:53.745" v="7679" actId="478"/>
-          <ac:picMkLst>
-            <pc:docMk/>
-            <pc:sldMk cId="944892801" sldId="348"/>
-            <ac:picMk id="11" creationId="{7539AE32-9030-2418-E148-5F97D4A74946}"/>
-          </ac:picMkLst>
-        </pc:picChg>
-        <pc:picChg chg="del">
-          <ac:chgData name="Simon Fong" userId="0989948daaec8292" providerId="LiveId" clId="{F12E0490-60F3-4147-9D04-93D87D41D5A0}" dt="2026-10-21T01:16:53.745" v="7679" actId="478"/>
-          <ac:picMkLst>
-            <pc:docMk/>
-            <pc:sldMk cId="944892801" sldId="348"/>
-            <ac:picMk id="13" creationId="{B762DE06-9771-0939-CB53-2425371FE04E}"/>
-          </ac:picMkLst>
-        </pc:picChg>
-        <pc:picChg chg="del">
-          <ac:chgData name="Simon Fong" userId="0989948daaec8292" providerId="LiveId" clId="{F12E0490-60F3-4147-9D04-93D87D41D5A0}" dt="2026-10-21T01:16:53.745" v="7679" actId="478"/>
-          <ac:picMkLst>
-            <pc:docMk/>
-            <pc:sldMk cId="944892801" sldId="348"/>
-            <ac:picMk id="15" creationId="{B21C0BAA-2B62-7556-2010-49959A14671D}"/>
-          </ac:picMkLst>
-        </pc:picChg>
-        <pc:cxnChg chg="del mod">
-          <ac:chgData name="Simon Fong" userId="0989948daaec8292" providerId="LiveId" clId="{F12E0490-60F3-4147-9D04-93D87D41D5A0}" dt="2026-10-21T01:16:53.745" v="7679" actId="478"/>
-          <ac:cxnSpMkLst>
-            <pc:docMk/>
-            <pc:sldMk cId="944892801" sldId="348"/>
-            <ac:cxnSpMk id="17" creationId="{3FD279FD-7FAD-6421-27DA-CC79C1BBD65D}"/>
-          </ac:cxnSpMkLst>
-        </pc:cxnChg>
-        <pc:cxnChg chg="del">
-          <ac:chgData name="Simon Fong" userId="0989948daaec8292" providerId="LiveId" clId="{F12E0490-60F3-4147-9D04-93D87D41D5A0}" dt="2026-10-21T01:16:53.745" v="7679" actId="478"/>
-          <ac:cxnSpMkLst>
-            <pc:docMk/>
-            <pc:sldMk cId="944892801" sldId="348"/>
-            <ac:cxnSpMk id="18" creationId="{481999CD-8E26-33A2-FD66-5345BD21CB7C}"/>
-          </ac:cxnSpMkLst>
-        </pc:cxnChg>
-      </pc:sldChg>
-      <pc:sldChg chg="addSp delSp modSp add del mod modTransition addAnim delAnim modAnim modNotesTx">
-        <pc:chgData name="Simon Fong" userId="0989948daaec8292" providerId="LiveId" clId="{F12E0490-60F3-4147-9D04-93D87D41D5A0}" dt="2026-10-21T23:23:04.901" v="11951" actId="47"/>
-        <pc:sldMkLst>
-          <pc:docMk/>
-          <pc:sldMk cId="3024977880" sldId="349"/>
-        </pc:sldMkLst>
-        <pc:spChg chg="mod">
-          <ac:chgData name="Simon Fong" userId="0989948daaec8292" providerId="LiveId" clId="{F12E0490-60F3-4147-9D04-93D87D41D5A0}" dt="2026-10-21T13:21:43.651" v="11111" actId="207"/>
-          <ac:spMkLst>
-            <pc:docMk/>
-            <pc:sldMk cId="3024977880" sldId="349"/>
-            <ac:spMk id="5" creationId="{61DA5399-811B-A824-BB1F-84DF2595A821}"/>
-          </ac:spMkLst>
-        </pc:spChg>
-        <pc:spChg chg="mod">
-          <ac:chgData name="Simon Fong" userId="0989948daaec8292" providerId="LiveId" clId="{F12E0490-60F3-4147-9D04-93D87D41D5A0}" dt="2026-10-21T13:03:10.362" v="10942" actId="2085"/>
-          <ac:spMkLst>
-            <pc:docMk/>
-            <pc:sldMk cId="3024977880" sldId="349"/>
-            <ac:spMk id="21" creationId="{D564F8E4-A3BC-5E0A-EBF8-92E7791845AE}"/>
-          </ac:spMkLst>
-        </pc:spChg>
-        <pc:picChg chg="mod">
-          <ac:chgData name="Simon Fong" userId="0989948daaec8292" providerId="LiveId" clId="{F12E0490-60F3-4147-9D04-93D87D41D5A0}" dt="2026-10-21T03:45:01.661" v="10252" actId="1037"/>
-          <ac:picMkLst>
-            <pc:docMk/>
-            <pc:sldMk cId="3024977880" sldId="349"/>
-            <ac:picMk id="3" creationId="{8E027EEA-3421-82EA-F581-A2E44FFE522A}"/>
-          </ac:picMkLst>
-        </pc:picChg>
-        <pc:picChg chg="del">
-          <ac:chgData name="Simon Fong" userId="0989948daaec8292" providerId="LiveId" clId="{F12E0490-60F3-4147-9D04-93D87D41D5A0}" dt="2026-10-21T01:24:06.748" v="7814" actId="478"/>
-          <ac:picMkLst>
-            <pc:docMk/>
-            <pc:sldMk cId="3024977880" sldId="349"/>
-            <ac:picMk id="6" creationId="{8FD5C782-A16B-1F66-D513-D0434A1D2D1B}"/>
-          </ac:picMkLst>
-        </pc:picChg>
-        <pc:picChg chg="mod">
-          <ac:chgData name="Simon Fong" userId="0989948daaec8292" providerId="LiveId" clId="{F12E0490-60F3-4147-9D04-93D87D41D5A0}" dt="2026-10-21T03:45:01.661" v="10252" actId="1037"/>
-          <ac:picMkLst>
-            <pc:docMk/>
-            <pc:sldMk cId="3024977880" sldId="349"/>
-            <ac:picMk id="7" creationId="{8F18041F-4A28-9FE4-3D56-31D7BF5ED8A6}"/>
-          </ac:picMkLst>
-        </pc:picChg>
-        <pc:picChg chg="mod">
-          <ac:chgData name="Simon Fong" userId="0989948daaec8292" providerId="LiveId" clId="{F12E0490-60F3-4147-9D04-93D87D41D5A0}" dt="2026-10-21T03:45:01.661" v="10252" actId="1037"/>
-          <ac:picMkLst>
-            <pc:docMk/>
-            <pc:sldMk cId="3024977880" sldId="349"/>
-            <ac:picMk id="8" creationId="{5AF8079C-124C-CC68-456C-5E077D30B4CE}"/>
-          </ac:picMkLst>
-        </pc:picChg>
-        <pc:picChg chg="add mod modCrop">
-          <ac:chgData name="Simon Fong" userId="0989948daaec8292" providerId="LiveId" clId="{F12E0490-60F3-4147-9D04-93D87D41D5A0}" dt="2026-10-21T13:03:20.916" v="10945" actId="1076"/>
-          <ac:picMkLst>
-            <pc:docMk/>
-            <pc:sldMk cId="3024977880" sldId="349"/>
-            <ac:picMk id="9" creationId="{71F41F8F-4E3E-FA74-22FD-AF86AD74AA28}"/>
-          </ac:picMkLst>
-        </pc:picChg>
-      </pc:sldChg>
-      <pc:sldChg chg="addSp delSp modSp add del mod modTransition addAnim delAnim modAnim">
-        <pc:chgData name="Simon Fong" userId="0989948daaec8292" providerId="LiveId" clId="{F12E0490-60F3-4147-9D04-93D87D41D5A0}" dt="2026-10-21T23:23:04.901" v="11951" actId="47"/>
-        <pc:sldMkLst>
-          <pc:docMk/>
-          <pc:sldMk cId="949559913" sldId="350"/>
-        </pc:sldMkLst>
-        <pc:spChg chg="mod">
-          <ac:chgData name="Simon Fong" userId="0989948daaec8292" providerId="LiveId" clId="{F12E0490-60F3-4147-9D04-93D87D41D5A0}" dt="2026-10-21T13:04:36.386" v="10966" actId="2710"/>
-          <ac:spMkLst>
-            <pc:docMk/>
-            <pc:sldMk cId="949559913" sldId="350"/>
-            <ac:spMk id="5" creationId="{1D816E4C-0072-C80F-B8F2-44B0F6857C4A}"/>
-          </ac:spMkLst>
-        </pc:spChg>
-        <pc:spChg chg="mod">
-          <ac:chgData name="Simon Fong" userId="0989948daaec8292" providerId="LiveId" clId="{F12E0490-60F3-4147-9D04-93D87D41D5A0}" dt="2026-10-21T13:04:24.555" v="10963" actId="2085"/>
-          <ac:spMkLst>
-            <pc:docMk/>
-            <pc:sldMk cId="949559913" sldId="350"/>
-            <ac:spMk id="21" creationId="{2D3212B4-4017-9E8D-8B68-154C87527969}"/>
-          </ac:spMkLst>
-        </pc:spChg>
-        <pc:picChg chg="mod">
-          <ac:chgData name="Simon Fong" userId="0989948daaec8292" providerId="LiveId" clId="{F12E0490-60F3-4147-9D04-93D87D41D5A0}" dt="2026-10-21T03:45:57.411" v="10283" actId="1038"/>
-          <ac:picMkLst>
-            <pc:docMk/>
-            <pc:sldMk cId="949559913" sldId="350"/>
-            <ac:picMk id="3" creationId="{87C5CC96-806F-F748-0469-DFA5909A8C99}"/>
-          </ac:picMkLst>
-        </pc:picChg>
-        <pc:picChg chg="add mod">
-          <ac:chgData name="Simon Fong" userId="0989948daaec8292" providerId="LiveId" clId="{F12E0490-60F3-4147-9D04-93D87D41D5A0}" dt="2026-10-21T13:04:47.882" v="10968" actId="1076"/>
-          <ac:picMkLst>
-            <pc:docMk/>
-            <pc:sldMk cId="949559913" sldId="350"/>
-            <ac:picMk id="6" creationId="{71E9EEFB-041F-E35C-B701-76018A20AA74}"/>
-          </ac:picMkLst>
-        </pc:picChg>
-        <pc:picChg chg="mod">
-          <ac:chgData name="Simon Fong" userId="0989948daaec8292" providerId="LiveId" clId="{F12E0490-60F3-4147-9D04-93D87D41D5A0}" dt="2026-10-21T03:45:57.411" v="10283" actId="1038"/>
-          <ac:picMkLst>
-            <pc:docMk/>
-            <pc:sldMk cId="949559913" sldId="350"/>
-            <ac:picMk id="7" creationId="{DDC310D6-FF86-3392-2804-13AF61F7603C}"/>
-          </ac:picMkLst>
-        </pc:picChg>
-        <pc:picChg chg="mod">
-          <ac:chgData name="Simon Fong" userId="0989948daaec8292" providerId="LiveId" clId="{F12E0490-60F3-4147-9D04-93D87D41D5A0}" dt="2026-10-21T03:45:57.411" v="10283" actId="1038"/>
-          <ac:picMkLst>
-            <pc:docMk/>
-            <pc:sldMk cId="949559913" sldId="350"/>
-            <ac:picMk id="8" creationId="{1F626FD9-84B5-5477-E4E1-7CE57E0CB7CB}"/>
-          </ac:picMkLst>
-        </pc:picChg>
-        <pc:picChg chg="del">
-          <ac:chgData name="Simon Fong" userId="0989948daaec8292" providerId="LiveId" clId="{F12E0490-60F3-4147-9D04-93D87D41D5A0}" dt="2026-10-21T01:26:13.247" v="7912" actId="478"/>
-          <ac:picMkLst>
-            <pc:docMk/>
-            <pc:sldMk cId="949559913" sldId="350"/>
-            <ac:picMk id="9" creationId="{8DAC61F1-D710-D532-F0BB-E15236367CB5}"/>
-          </ac:picMkLst>
-        </pc:picChg>
-      </pc:sldChg>
-      <pc:sldChg chg="addSp modSp add del mod ord modTransition addAnim delAnim modAnim">
-        <pc:chgData name="Simon Fong" userId="0989948daaec8292" providerId="LiveId" clId="{F12E0490-60F3-4147-9D04-93D87D41D5A0}" dt="2026-10-21T23:23:04.901" v="11951" actId="47"/>
-        <pc:sldMkLst>
-          <pc:docMk/>
-          <pc:sldMk cId="531339455" sldId="351"/>
-        </pc:sldMkLst>
-        <pc:spChg chg="mod">
-          <ac:chgData name="Simon Fong" userId="0989948daaec8292" providerId="LiveId" clId="{F12E0490-60F3-4147-9D04-93D87D41D5A0}" dt="2026-10-21T13:07:52.632" v="11021" actId="207"/>
-          <ac:spMkLst>
-            <pc:docMk/>
-            <pc:sldMk cId="531339455" sldId="351"/>
-            <ac:spMk id="5" creationId="{A35F2965-0C69-E248-8D70-710C2BDE0975}"/>
-          </ac:spMkLst>
-        </pc:spChg>
-        <pc:spChg chg="mod">
-          <ac:chgData name="Simon Fong" userId="0989948daaec8292" providerId="LiveId" clId="{F12E0490-60F3-4147-9D04-93D87D41D5A0}" dt="2026-10-21T13:07:11.005" v="11002" actId="2085"/>
-          <ac:spMkLst>
-            <pc:docMk/>
-            <pc:sldMk cId="531339455" sldId="351"/>
-            <ac:spMk id="21" creationId="{796B01BE-0A41-168A-ED76-93E134234257}"/>
-          </ac:spMkLst>
-        </pc:spChg>
-        <pc:picChg chg="add mod">
-          <ac:chgData name="Simon Fong" userId="0989948daaec8292" providerId="LiveId" clId="{F12E0490-60F3-4147-9D04-93D87D41D5A0}" dt="2026-10-21T03:48:51.622" v="10395" actId="1038"/>
-          <ac:picMkLst>
-            <pc:docMk/>
-            <pc:sldMk cId="531339455" sldId="351"/>
-            <ac:picMk id="2" creationId="{ADE4FCBA-10C7-73F0-6979-FBAD0FCD5338}"/>
-          </ac:picMkLst>
-        </pc:picChg>
-        <pc:picChg chg="mod">
-          <ac:chgData name="Simon Fong" userId="0989948daaec8292" providerId="LiveId" clId="{F12E0490-60F3-4147-9D04-93D87D41D5A0}" dt="2026-10-21T03:48:51.622" v="10395" actId="1038"/>
-          <ac:picMkLst>
-            <pc:docMk/>
-            <pc:sldMk cId="531339455" sldId="351"/>
-            <ac:picMk id="3" creationId="{7E876343-6FCE-7A6B-90CC-9261318EFF4B}"/>
-          </ac:picMkLst>
-        </pc:picChg>
-        <pc:picChg chg="mod">
-          <ac:chgData name="Simon Fong" userId="0989948daaec8292" providerId="LiveId" clId="{F12E0490-60F3-4147-9D04-93D87D41D5A0}" dt="2026-10-21T03:48:51.622" v="10395" actId="1038"/>
-          <ac:picMkLst>
-            <pc:docMk/>
-            <pc:sldMk cId="531339455" sldId="351"/>
-            <ac:picMk id="7" creationId="{8FE380F7-2A70-7FE1-DEA3-EF59681DB035}"/>
-          </ac:picMkLst>
-        </pc:picChg>
-        <pc:picChg chg="mod">
-          <ac:chgData name="Simon Fong" userId="0989948daaec8292" providerId="LiveId" clId="{F12E0490-60F3-4147-9D04-93D87D41D5A0}" dt="2026-10-21T03:48:51.622" v="10395" actId="1038"/>
-          <ac:picMkLst>
-            <pc:docMk/>
-            <pc:sldMk cId="531339455" sldId="351"/>
-            <ac:picMk id="8" creationId="{E2DBBC87-DBF4-4F70-96DD-9AB60111A7BD}"/>
-          </ac:picMkLst>
-        </pc:picChg>
-      </pc:sldChg>
-      <pc:sldChg chg="addSp delSp modSp add del mod modTransition addAnim delAnim modAnim modNotesTx">
-        <pc:chgData name="Simon Fong" userId="0989948daaec8292" providerId="LiveId" clId="{F12E0490-60F3-4147-9D04-93D87D41D5A0}" dt="2026-10-21T23:23:04.901" v="11951" actId="47"/>
-        <pc:sldMkLst>
-          <pc:docMk/>
-          <pc:sldMk cId="3509043029" sldId="352"/>
-        </pc:sldMkLst>
-        <pc:spChg chg="add del mod">
-          <ac:chgData name="Simon Fong" userId="0989948daaec8292" providerId="LiveId" clId="{F12E0490-60F3-4147-9D04-93D87D41D5A0}" dt="2026-10-21T15:44:47.267" v="11156" actId="478"/>
-          <ac:spMkLst>
-            <pc:docMk/>
-            <pc:sldMk cId="3509043029" sldId="352"/>
-            <ac:spMk id="4" creationId="{1A9BB750-2024-D94A-FB28-94DB7B44C532}"/>
-          </ac:spMkLst>
-        </pc:spChg>
-        <pc:spChg chg="mod">
-          <ac:chgData name="Simon Fong" userId="0989948daaec8292" providerId="LiveId" clId="{F12E0490-60F3-4147-9D04-93D87D41D5A0}" dt="2026-10-21T15:41:11.683" v="11113" actId="20577"/>
-          <ac:spMkLst>
-            <pc:docMk/>
-            <pc:sldMk cId="3509043029" sldId="352"/>
-            <ac:spMk id="5" creationId="{10715739-9713-BF85-AB40-C6E97A9527DB}"/>
-          </ac:spMkLst>
-        </pc:spChg>
-        <pc:spChg chg="add mod">
-          <ac:chgData name="Simon Fong" userId="0989948daaec8292" providerId="LiveId" clId="{F12E0490-60F3-4147-9D04-93D87D41D5A0}" dt="2026-10-21T15:45:07.854" v="11159" actId="207"/>
-          <ac:spMkLst>
-            <pc:docMk/>
-            <pc:sldMk cId="3509043029" sldId="352"/>
-            <ac:spMk id="6" creationId="{2C2C232A-8EE3-27B9-148C-A5D8A6048784}"/>
-          </ac:spMkLst>
-        </pc:spChg>
-        <pc:spChg chg="mod">
-          <ac:chgData name="Simon Fong" userId="0989948daaec8292" providerId="LiveId" clId="{F12E0490-60F3-4147-9D04-93D87D41D5A0}" dt="2026-10-21T13:10:03.146" v="11024" actId="2085"/>
-          <ac:spMkLst>
-            <pc:docMk/>
-            <pc:sldMk cId="3509043029" sldId="352"/>
-            <ac:spMk id="21" creationId="{E39DA962-E80A-58D4-CA24-ED389FFC3611}"/>
-          </ac:spMkLst>
-        </pc:spChg>
-        <pc:picChg chg="del">
-          <ac:chgData name="Simon Fong" userId="0989948daaec8292" providerId="LiveId" clId="{F12E0490-60F3-4147-9D04-93D87D41D5A0}" dt="2026-10-21T01:39:01.170" v="8434" actId="478"/>
-          <ac:picMkLst>
-            <pc:docMk/>
-            <pc:sldMk cId="3509043029" sldId="352"/>
-            <ac:picMk id="2" creationId="{E4C10581-6728-955E-B621-55F3C0533202}"/>
-          </ac:picMkLst>
-        </pc:picChg>
-        <pc:picChg chg="del">
-          <ac:chgData name="Simon Fong" userId="0989948daaec8292" providerId="LiveId" clId="{F12E0490-60F3-4147-9D04-93D87D41D5A0}" dt="2026-10-21T01:39:04.218" v="8437" actId="478"/>
-          <ac:picMkLst>
-            <pc:docMk/>
-            <pc:sldMk cId="3509043029" sldId="352"/>
-            <ac:picMk id="3" creationId="{17B3222E-0A71-47BB-A67F-AD137F569B64}"/>
-          </ac:picMkLst>
-        </pc:picChg>
-        <pc:picChg chg="add mod">
-          <ac:chgData name="Simon Fong" userId="0989948daaec8292" providerId="LiveId" clId="{F12E0490-60F3-4147-9D04-93D87D41D5A0}" dt="2026-10-21T16:02:08.647" v="11470" actId="14826"/>
-          <ac:picMkLst>
-            <pc:docMk/>
-            <pc:sldMk cId="3509043029" sldId="352"/>
-            <ac:picMk id="3" creationId="{362CCE02-A1FF-37A2-6E6D-D2F5AF82E309}"/>
-          </ac:picMkLst>
-        </pc:picChg>
-        <pc:picChg chg="del">
-          <ac:chgData name="Simon Fong" userId="0989948daaec8292" providerId="LiveId" clId="{F12E0490-60F3-4147-9D04-93D87D41D5A0}" dt="2026-10-21T01:39:10.936" v="8438" actId="478"/>
-          <ac:picMkLst>
-            <pc:docMk/>
-            <pc:sldMk cId="3509043029" sldId="352"/>
-            <ac:picMk id="4" creationId="{9FEF0806-AB6A-A976-3597-2B062635A67C}"/>
-          </ac:picMkLst>
-        </pc:picChg>
-        <pc:picChg chg="del">
-          <ac:chgData name="Simon Fong" userId="0989948daaec8292" providerId="LiveId" clId="{F12E0490-60F3-4147-9D04-93D87D41D5A0}" dt="2026-10-21T01:39:02.600" v="8435" actId="478"/>
-          <ac:picMkLst>
-            <pc:docMk/>
-            <pc:sldMk cId="3509043029" sldId="352"/>
-            <ac:picMk id="7" creationId="{21D133E3-BE84-BAEA-62DC-23EA81893F17}"/>
-          </ac:picMkLst>
-        </pc:picChg>
-        <pc:picChg chg="del">
-          <ac:chgData name="Simon Fong" userId="0989948daaec8292" providerId="LiveId" clId="{F12E0490-60F3-4147-9D04-93D87D41D5A0}" dt="2026-10-21T01:39:03.472" v="8436" actId="478"/>
-          <ac:picMkLst>
-            <pc:docMk/>
-            <pc:sldMk cId="3509043029" sldId="352"/>
-            <ac:picMk id="8" creationId="{ACE0A5DB-EDC8-1B1A-3223-84C6EF9F989B}"/>
-          </ac:picMkLst>
-        </pc:picChg>
-      </pc:sldChg>
-      <pc:sldChg chg="modSp add del mod modTransition modAnim">
-        <pc:chgData name="Simon Fong" userId="0989948daaec8292" providerId="LiveId" clId="{F12E0490-60F3-4147-9D04-93D87D41D5A0}" dt="2026-10-21T16:17:20.058" v="11516" actId="47"/>
-        <pc:sldMkLst>
-          <pc:docMk/>
-          <pc:sldMk cId="2288475341" sldId="353"/>
-        </pc:sldMkLst>
-        <pc:spChg chg="mod">
-          <ac:chgData name="Simon Fong" userId="0989948daaec8292" providerId="LiveId" clId="{F12E0490-60F3-4147-9D04-93D87D41D5A0}" dt="2026-10-21T03:52:44.965" v="10486" actId="207"/>
-          <ac:spMkLst>
-            <pc:docMk/>
-            <pc:sldMk cId="2288475341" sldId="353"/>
-            <ac:spMk id="5" creationId="{2F486437-8353-4EE1-0B36-381A28C60947}"/>
-          </ac:spMkLst>
-        </pc:spChg>
-        <pc:spChg chg="mod">
-          <ac:chgData name="Simon Fong" userId="0989948daaec8292" providerId="LiveId" clId="{F12E0490-60F3-4147-9D04-93D87D41D5A0}" dt="2026-10-21T13:10:11.278" v="11027" actId="179"/>
-          <ac:spMkLst>
-            <pc:docMk/>
-            <pc:sldMk cId="2288475341" sldId="353"/>
-            <ac:spMk id="21" creationId="{64829C5F-7205-4D25-5D75-E2EE5D0EA75D}"/>
-          </ac:spMkLst>
-        </pc:spChg>
       </pc:sldChg>
       <pc:sldChg chg="delSp modSp add mod modTransition addAnim delAnim modAnim modNotesTx">
         <pc:chgData name="Simon Fong" userId="0989948daaec8292" providerId="LiveId" clId="{F12E0490-60F3-4147-9D04-93D87D41D5A0}" dt="2026-10-22T01:36:45.706" v="12664"/>
@@ -1637,14 +241,6 @@
             <ac:spMk id="5" creationId="{E4947C39-FB44-13AB-6D85-5B4536E612D4}"/>
           </ac:spMkLst>
         </pc:spChg>
-        <pc:picChg chg="del mod">
-          <ac:chgData name="Simon Fong" userId="0989948daaec8292" providerId="LiveId" clId="{F12E0490-60F3-4147-9D04-93D87D41D5A0}" dt="2026-10-21T23:22:22.582" v="11948" actId="478"/>
-          <ac:picMkLst>
-            <pc:docMk/>
-            <pc:sldMk cId="3746039619" sldId="354"/>
-            <ac:picMk id="15" creationId="{8A30C845-2B6A-C67B-FAAA-D62650087A95}"/>
-          </ac:picMkLst>
-        </pc:picChg>
       </pc:sldChg>
       <pc:sldChg chg="modSp add mod modTransition addAnim delAnim modAnim">
         <pc:chgData name="Simon Fong" userId="0989948daaec8292" providerId="LiveId" clId="{F12E0490-60F3-4147-9D04-93D87D41D5A0}" dt="2026-10-22T01:58:01.707" v="12712"/>
@@ -1677,13 +273,6 @@
           </ac:picMkLst>
         </pc:picChg>
       </pc:sldChg>
-      <pc:sldChg chg="add del">
-        <pc:chgData name="Simon Fong" userId="0989948daaec8292" providerId="LiveId" clId="{F12E0490-60F3-4147-9D04-93D87D41D5A0}" dt="2026-10-21T16:17:18.525" v="11515" actId="47"/>
-        <pc:sldMkLst>
-          <pc:docMk/>
-          <pc:sldMk cId="2882348766" sldId="355"/>
-        </pc:sldMkLst>
-      </pc:sldChg>
       <pc:sldChg chg="delSp modSp add mod addAnim delAnim modAnim">
         <pc:chgData name="Simon Fong" userId="0989948daaec8292" providerId="LiveId" clId="{F12E0490-60F3-4147-9D04-93D87D41D5A0}" dt="2026-10-22T02:00:03.202" v="12763"/>
         <pc:sldMkLst>
@@ -1712,52 +301,6 @@
             <pc:docMk/>
             <pc:sldMk cId="1028939191" sldId="356"/>
             <ac:picMk id="3" creationId="{2D35EBF2-31CF-4747-2BE9-83B18BB58316}"/>
-          </ac:picMkLst>
-        </pc:picChg>
-      </pc:sldChg>
-      <pc:sldChg chg="modSp add del mod modTransition modAnim modNotesTx">
-        <pc:chgData name="Simon Fong" userId="0989948daaec8292" providerId="LiveId" clId="{F12E0490-60F3-4147-9D04-93D87D41D5A0}" dt="2026-10-21T23:23:04.901" v="11951" actId="47"/>
-        <pc:sldMkLst>
-          <pc:docMk/>
-          <pc:sldMk cId="3589390894" sldId="356"/>
-        </pc:sldMkLst>
-        <pc:spChg chg="mod">
-          <ac:chgData name="Simon Fong" userId="0989948daaec8292" providerId="LiveId" clId="{F12E0490-60F3-4147-9D04-93D87D41D5A0}" dt="2026-10-21T15:47:58.528" v="11209" actId="14100"/>
-          <ac:spMkLst>
-            <pc:docMk/>
-            <pc:sldMk cId="3589390894" sldId="356"/>
-            <ac:spMk id="6" creationId="{A5E1E015-23C3-D12E-E4F8-A2711F021999}"/>
-          </ac:spMkLst>
-        </pc:spChg>
-        <pc:picChg chg="mod">
-          <ac:chgData name="Simon Fong" userId="0989948daaec8292" providerId="LiveId" clId="{F12E0490-60F3-4147-9D04-93D87D41D5A0}" dt="2026-10-21T16:02:16.798" v="11471" actId="14826"/>
-          <ac:picMkLst>
-            <pc:docMk/>
-            <pc:sldMk cId="3589390894" sldId="356"/>
-            <ac:picMk id="3" creationId="{7937E774-7CCA-2A71-EA69-722B6AB63A2B}"/>
-          </ac:picMkLst>
-        </pc:picChg>
-      </pc:sldChg>
-      <pc:sldChg chg="modSp add del mod modTransition modNotesTx">
-        <pc:chgData name="Simon Fong" userId="0989948daaec8292" providerId="LiveId" clId="{F12E0490-60F3-4147-9D04-93D87D41D5A0}" dt="2026-10-21T23:23:04.901" v="11951" actId="47"/>
-        <pc:sldMkLst>
-          <pc:docMk/>
-          <pc:sldMk cId="2350224871" sldId="357"/>
-        </pc:sldMkLst>
-        <pc:spChg chg="mod">
-          <ac:chgData name="Simon Fong" userId="0989948daaec8292" providerId="LiveId" clId="{F12E0490-60F3-4147-9D04-93D87D41D5A0}" dt="2026-10-21T15:57:47.607" v="11306" actId="14100"/>
-          <ac:spMkLst>
-            <pc:docMk/>
-            <pc:sldMk cId="2350224871" sldId="357"/>
-            <ac:spMk id="6" creationId="{D8FD39D0-9B43-DED0-5DAD-B48EACA740BC}"/>
-          </ac:spMkLst>
-        </pc:spChg>
-        <pc:picChg chg="mod">
-          <ac:chgData name="Simon Fong" userId="0989948daaec8292" providerId="LiveId" clId="{F12E0490-60F3-4147-9D04-93D87D41D5A0}" dt="2026-10-21T16:02:23.336" v="11472" actId="14826"/>
-          <ac:picMkLst>
-            <pc:docMk/>
-            <pc:sldMk cId="2350224871" sldId="357"/>
-            <ac:picMk id="3" creationId="{0C949CC4-404A-1612-8971-E31A560D2942}"/>
           </ac:picMkLst>
         </pc:picChg>
       </pc:sldChg>
@@ -1863,29 +406,6 @@
           </ac:picMkLst>
         </pc:picChg>
       </pc:sldChg>
-      <pc:sldChg chg="modSp add del mod modTransition modNotesTx">
-        <pc:chgData name="Simon Fong" userId="0989948daaec8292" providerId="LiveId" clId="{F12E0490-60F3-4147-9D04-93D87D41D5A0}" dt="2026-10-21T23:23:04.901" v="11951" actId="47"/>
-        <pc:sldMkLst>
-          <pc:docMk/>
-          <pc:sldMk cId="3086191465" sldId="358"/>
-        </pc:sldMkLst>
-        <pc:spChg chg="mod">
-          <ac:chgData name="Simon Fong" userId="0989948daaec8292" providerId="LiveId" clId="{F12E0490-60F3-4147-9D04-93D87D41D5A0}" dt="2026-10-21T15:59:08.572" v="11354" actId="14100"/>
-          <ac:spMkLst>
-            <pc:docMk/>
-            <pc:sldMk cId="3086191465" sldId="358"/>
-            <ac:spMk id="6" creationId="{9CECAFDD-8183-910F-8447-52D5251C1783}"/>
-          </ac:spMkLst>
-        </pc:spChg>
-        <pc:picChg chg="mod">
-          <ac:chgData name="Simon Fong" userId="0989948daaec8292" providerId="LiveId" clId="{F12E0490-60F3-4147-9D04-93D87D41D5A0}" dt="2026-10-21T16:02:30.187" v="11473" actId="14826"/>
-          <ac:picMkLst>
-            <pc:docMk/>
-            <pc:sldMk cId="3086191465" sldId="358"/>
-            <ac:picMk id="3" creationId="{E0C36C1A-EB18-1FBE-6D37-8E7F0A7D43D2}"/>
-          </ac:picMkLst>
-        </pc:picChg>
-      </pc:sldChg>
       <pc:sldChg chg="addSp delSp modSp add mod addAnim delAnim modAnim">
         <pc:chgData name="Simon Fong" userId="0989948daaec8292" providerId="LiveId" clId="{F12E0490-60F3-4147-9D04-93D87D41D5A0}" dt="2026-10-22T02:21:00.712" v="13102" actId="207"/>
         <pc:sldMkLst>
@@ -1925,29 +445,6 @@
           </ac:picMkLst>
         </pc:picChg>
       </pc:sldChg>
-      <pc:sldChg chg="modSp add del mod modTransition modNotesTx">
-        <pc:chgData name="Simon Fong" userId="0989948daaec8292" providerId="LiveId" clId="{F12E0490-60F3-4147-9D04-93D87D41D5A0}" dt="2026-10-21T23:23:04.901" v="11951" actId="47"/>
-        <pc:sldMkLst>
-          <pc:docMk/>
-          <pc:sldMk cId="3365818493" sldId="359"/>
-        </pc:sldMkLst>
-        <pc:spChg chg="mod">
-          <ac:chgData name="Simon Fong" userId="0989948daaec8292" providerId="LiveId" clId="{F12E0490-60F3-4147-9D04-93D87D41D5A0}" dt="2026-10-21T16:03:56.268" v="11491" actId="14100"/>
-          <ac:spMkLst>
-            <pc:docMk/>
-            <pc:sldMk cId="3365818493" sldId="359"/>
-            <ac:spMk id="6" creationId="{1F0102E9-6916-4713-9F93-379CAE1C011F}"/>
-          </ac:spMkLst>
-        </pc:spChg>
-        <pc:picChg chg="mod">
-          <ac:chgData name="Simon Fong" userId="0989948daaec8292" providerId="LiveId" clId="{F12E0490-60F3-4147-9D04-93D87D41D5A0}" dt="2026-10-21T16:02:36.472" v="11474" actId="14826"/>
-          <ac:picMkLst>
-            <pc:docMk/>
-            <pc:sldMk cId="3365818493" sldId="359"/>
-            <ac:picMk id="3" creationId="{5C46897D-AD17-E03C-1804-D6264C6EF6EE}"/>
-          </ac:picMkLst>
-        </pc:picChg>
-      </pc:sldChg>
       <pc:sldChg chg="addSp delSp modSp add mod addAnim delAnim modAnim">
         <pc:chgData name="Simon Fong" userId="0989948daaec8292" providerId="LiveId" clId="{F12E0490-60F3-4147-9D04-93D87D41D5A0}" dt="2026-10-22T02:04:21.780" v="12844"/>
         <pc:sldMkLst>
@@ -1979,29 +476,6 @@
           </ac:picMkLst>
         </pc:picChg>
       </pc:sldChg>
-      <pc:sldChg chg="addSp delSp modSp add del mod ord modAnim">
-        <pc:chgData name="Simon Fong" userId="0989948daaec8292" providerId="LiveId" clId="{F12E0490-60F3-4147-9D04-93D87D41D5A0}" dt="2026-10-21T16:26:16.958" v="11521" actId="47"/>
-        <pc:sldMkLst>
-          <pc:docMk/>
-          <pc:sldMk cId="1680775075" sldId="360"/>
-        </pc:sldMkLst>
-        <pc:spChg chg="mod">
-          <ac:chgData name="Simon Fong" userId="0989948daaec8292" providerId="LiveId" clId="{F12E0490-60F3-4147-9D04-93D87D41D5A0}" dt="2026-10-21T16:06:19.652" v="11496" actId="6549"/>
-          <ac:spMkLst>
-            <pc:docMk/>
-            <pc:sldMk cId="1680775075" sldId="360"/>
-            <ac:spMk id="24" creationId="{B2AD38A4-933B-FD5B-9076-F68F658375BB}"/>
-          </ac:spMkLst>
-        </pc:spChg>
-        <pc:picChg chg="add del">
-          <ac:chgData name="Simon Fong" userId="0989948daaec8292" providerId="LiveId" clId="{F12E0490-60F3-4147-9D04-93D87D41D5A0}" dt="2026-10-21T16:25:46.364" v="11519" actId="478"/>
-          <ac:picMkLst>
-            <pc:docMk/>
-            <pc:sldMk cId="1680775075" sldId="360"/>
-            <ac:picMk id="32" creationId="{9DC1DDB9-497D-8B88-4CD4-839ECD382119}"/>
-          </ac:picMkLst>
-        </pc:picChg>
-      </pc:sldChg>
       <pc:sldChg chg="delSp modSp add mod addAnim delAnim modAnim">
         <pc:chgData name="Simon Fong" userId="0989948daaec8292" providerId="LiveId" clId="{F12E0490-60F3-4147-9D04-93D87D41D5A0}" dt="2026-10-22T02:05:23.893" v="12858"/>
         <pc:sldMkLst>
@@ -2030,108 +504,6 @@
             <pc:docMk/>
             <pc:sldMk cId="3014092043" sldId="361"/>
             <ac:picMk id="3" creationId="{09826AC2-0158-A2B5-1CFB-E1AE774EAF0E}"/>
-          </ac:picMkLst>
-        </pc:picChg>
-      </pc:sldChg>
-      <pc:sldChg chg="addSp delSp modSp add del mod">
-        <pc:chgData name="Simon Fong" userId="0989948daaec8292" providerId="LiveId" clId="{F12E0490-60F3-4147-9D04-93D87D41D5A0}" dt="2026-10-21T16:33:17.911" v="11530" actId="2696"/>
-        <pc:sldMkLst>
-          <pc:docMk/>
-          <pc:sldMk cId="3816560892" sldId="361"/>
-        </pc:sldMkLst>
-        <pc:spChg chg="add mod">
-          <ac:chgData name="Simon Fong" userId="0989948daaec8292" providerId="LiveId" clId="{F12E0490-60F3-4147-9D04-93D87D41D5A0}" dt="2026-10-21T16:33:04.352" v="11526" actId="767"/>
-          <ac:spMkLst>
-            <pc:docMk/>
-            <pc:sldMk cId="3816560892" sldId="361"/>
-            <ac:spMk id="2" creationId="{A4ED4B4B-66AE-1466-4274-8981F4B4E026}"/>
-          </ac:spMkLst>
-        </pc:spChg>
-        <pc:spChg chg="del">
-          <ac:chgData name="Simon Fong" userId="0989948daaec8292" providerId="LiveId" clId="{F12E0490-60F3-4147-9D04-93D87D41D5A0}" dt="2026-10-21T16:26:21.029" v="11523" actId="478"/>
-          <ac:spMkLst>
-            <pc:docMk/>
-            <pc:sldMk cId="3816560892" sldId="361"/>
-            <ac:spMk id="6" creationId="{AD36CEF3-907A-5FAA-A0AA-00F3AA75DF6A}"/>
-          </ac:spMkLst>
-        </pc:spChg>
-        <pc:spChg chg="mod">
-          <ac:chgData name="Simon Fong" userId="0989948daaec8292" providerId="LiveId" clId="{F12E0490-60F3-4147-9D04-93D87D41D5A0}" dt="2026-10-21T16:33:01.954" v="11524" actId="6549"/>
-          <ac:spMkLst>
-            <pc:docMk/>
-            <pc:sldMk cId="3816560892" sldId="361"/>
-            <ac:spMk id="21" creationId="{B4BF7C72-A591-B7DE-8384-D5728952FAB5}"/>
-          </ac:spMkLst>
-        </pc:spChg>
-        <pc:picChg chg="del">
-          <ac:chgData name="Simon Fong" userId="0989948daaec8292" providerId="LiveId" clId="{F12E0490-60F3-4147-9D04-93D87D41D5A0}" dt="2026-10-21T16:26:19.726" v="11522" actId="478"/>
-          <ac:picMkLst>
-            <pc:docMk/>
-            <pc:sldMk cId="3816560892" sldId="361"/>
-            <ac:picMk id="3" creationId="{351619FB-5C3B-9F5F-D261-555764810D54}"/>
-          </ac:picMkLst>
-        </pc:picChg>
-      </pc:sldChg>
-      <pc:sldChg chg="delSp modSp add del mod ord modTransition delAnim modAnim">
-        <pc:chgData name="Simon Fong" userId="0989948daaec8292" providerId="LiveId" clId="{F12E0490-60F3-4147-9D04-93D87D41D5A0}" dt="2026-10-21T23:23:04.901" v="11951" actId="47"/>
-        <pc:sldMkLst>
-          <pc:docMk/>
-          <pc:sldMk cId="1607717512" sldId="362"/>
-        </pc:sldMkLst>
-        <pc:spChg chg="mod">
-          <ac:chgData name="Simon Fong" userId="0989948daaec8292" providerId="LiveId" clId="{F12E0490-60F3-4147-9D04-93D87D41D5A0}" dt="2026-10-21T21:46:57.035" v="11825" actId="5793"/>
-          <ac:spMkLst>
-            <pc:docMk/>
-            <pc:sldMk cId="1607717512" sldId="362"/>
-            <ac:spMk id="5" creationId="{3D43E055-5A9B-0C8F-9EB7-952970FE1877}"/>
-          </ac:spMkLst>
-        </pc:spChg>
-        <pc:spChg chg="mod">
-          <ac:chgData name="Simon Fong" userId="0989948daaec8292" providerId="LiveId" clId="{F12E0490-60F3-4147-9D04-93D87D41D5A0}" dt="2026-10-21T21:46:51.240" v="11823" actId="255"/>
-          <ac:spMkLst>
-            <pc:docMk/>
-            <pc:sldMk cId="1607717512" sldId="362"/>
-            <ac:spMk id="21" creationId="{6858D4A1-E58F-932C-99AE-B99C27499249}"/>
-          </ac:spMkLst>
-        </pc:spChg>
-        <pc:picChg chg="del">
-          <ac:chgData name="Simon Fong" userId="0989948daaec8292" providerId="LiveId" clId="{F12E0490-60F3-4147-9D04-93D87D41D5A0}" dt="2026-10-21T16:33:30.173" v="11536" actId="478"/>
-          <ac:picMkLst>
-            <pc:docMk/>
-            <pc:sldMk cId="1607717512" sldId="362"/>
-            <ac:picMk id="2" creationId="{CDBD5C7E-692D-E1FA-DAB2-2CB4B42A46F8}"/>
-          </ac:picMkLst>
-        </pc:picChg>
-        <pc:picChg chg="del">
-          <ac:chgData name="Simon Fong" userId="0989948daaec8292" providerId="LiveId" clId="{F12E0490-60F3-4147-9D04-93D87D41D5A0}" dt="2026-10-21T16:33:27.421" v="11533" actId="478"/>
-          <ac:picMkLst>
-            <pc:docMk/>
-            <pc:sldMk cId="1607717512" sldId="362"/>
-            <ac:picMk id="3" creationId="{C9C2669A-78EB-885C-E3F8-A6332C39F64D}"/>
-          </ac:picMkLst>
-        </pc:picChg>
-        <pc:picChg chg="del">
-          <ac:chgData name="Simon Fong" userId="0989948daaec8292" providerId="LiveId" clId="{F12E0490-60F3-4147-9D04-93D87D41D5A0}" dt="2026-10-21T16:33:25.989" v="11532" actId="478"/>
-          <ac:picMkLst>
-            <pc:docMk/>
-            <pc:sldMk cId="1607717512" sldId="362"/>
-            <ac:picMk id="4" creationId="{DA75CFDA-51D7-560A-695D-1A14CDE67B5F}"/>
-          </ac:picMkLst>
-        </pc:picChg>
-        <pc:picChg chg="del">
-          <ac:chgData name="Simon Fong" userId="0989948daaec8292" providerId="LiveId" clId="{F12E0490-60F3-4147-9D04-93D87D41D5A0}" dt="2026-10-21T16:33:29.261" v="11535" actId="478"/>
-          <ac:picMkLst>
-            <pc:docMk/>
-            <pc:sldMk cId="1607717512" sldId="362"/>
-            <ac:picMk id="7" creationId="{11056B17-B6C3-85D6-2263-BDF546DF4F9D}"/>
-          </ac:picMkLst>
-        </pc:picChg>
-        <pc:picChg chg="del">
-          <ac:chgData name="Simon Fong" userId="0989948daaec8292" providerId="LiveId" clId="{F12E0490-60F3-4147-9D04-93D87D41D5A0}" dt="2026-10-21T16:33:28.207" v="11534" actId="478"/>
-          <ac:picMkLst>
-            <pc:docMk/>
-            <pc:sldMk cId="1607717512" sldId="362"/>
-            <ac:picMk id="8" creationId="{6B74F5B2-4564-46F5-77D3-47C592773978}"/>
           </ac:picMkLst>
         </pc:picChg>
       </pc:sldChg>
@@ -2604,7 +976,7 @@
           <a:p>
             <a:fld id="{DE5C3641-D97D-4221-8E4A-4CE191803EE4}" type="datetimeFigureOut">
               <a:rPr lang="en-CA" smtClean="0"/>
-              <a:t>2026-10-21</a:t>
+              <a:t>2026-10-23</a:t>
             </a:fld>
             <a:endParaRPr lang="en-CA"/>
           </a:p>
@@ -5176,7 +3548,7 @@
           <a:p>
             <a:fld id="{8D757EAC-F02C-41AB-966A-B857386BB5B4}" type="datetimeFigureOut">
               <a:rPr lang="en-CA" smtClean="0"/>
-              <a:t>2026-10-21</a:t>
+              <a:t>2026-10-23</a:t>
             </a:fld>
             <a:endParaRPr lang="en-CA"/>
           </a:p>
@@ -5376,7 +3748,7 @@
           <a:p>
             <a:fld id="{8D757EAC-F02C-41AB-966A-B857386BB5B4}" type="datetimeFigureOut">
               <a:rPr lang="en-CA" smtClean="0"/>
-              <a:t>2026-10-21</a:t>
+              <a:t>2026-10-23</a:t>
             </a:fld>
             <a:endParaRPr lang="en-CA"/>
           </a:p>
@@ -5586,7 +3958,7 @@
           <a:p>
             <a:fld id="{8D757EAC-F02C-41AB-966A-B857386BB5B4}" type="datetimeFigureOut">
               <a:rPr lang="en-CA" smtClean="0"/>
-              <a:t>2026-10-21</a:t>
+              <a:t>2026-10-23</a:t>
             </a:fld>
             <a:endParaRPr lang="en-CA"/>
           </a:p>
@@ -5877,7 +4249,7 @@
           <a:p>
             <a:fld id="{9961397C-706D-4EB8-B1E1-D1B680D284C3}" type="datetime1">
               <a:rPr lang="en-US" smtClean="0"/>
-              <a:t>10/21/2026</a:t>
+              <a:t>10/23/2026</a:t>
             </a:fld>
             <a:endParaRPr lang="en-US"/>
           </a:p>
@@ -6082,7 +4454,7 @@
           <a:p>
             <a:fld id="{8D757EAC-F02C-41AB-966A-B857386BB5B4}" type="datetimeFigureOut">
               <a:rPr lang="en-CA" smtClean="0"/>
-              <a:t>2026-10-21</a:t>
+              <a:t>2026-10-23</a:t>
             </a:fld>
             <a:endParaRPr lang="en-CA"/>
           </a:p>
@@ -6358,7 +4730,7 @@
           <a:p>
             <a:fld id="{8D757EAC-F02C-41AB-966A-B857386BB5B4}" type="datetimeFigureOut">
               <a:rPr lang="en-CA" smtClean="0"/>
-              <a:t>2026-10-21</a:t>
+              <a:t>2026-10-23</a:t>
             </a:fld>
             <a:endParaRPr lang="en-CA"/>
           </a:p>
@@ -6626,7 +4998,7 @@
           <a:p>
             <a:fld id="{8D757EAC-F02C-41AB-966A-B857386BB5B4}" type="datetimeFigureOut">
               <a:rPr lang="en-CA" smtClean="0"/>
-              <a:t>2026-10-21</a:t>
+              <a:t>2026-10-23</a:t>
             </a:fld>
             <a:endParaRPr lang="en-CA"/>
           </a:p>
@@ -7041,7 +5413,7 @@
           <a:p>
             <a:fld id="{8D757EAC-F02C-41AB-966A-B857386BB5B4}" type="datetimeFigureOut">
               <a:rPr lang="en-CA" smtClean="0"/>
-              <a:t>2026-10-21</a:t>
+              <a:t>2026-10-23</a:t>
             </a:fld>
             <a:endParaRPr lang="en-CA"/>
           </a:p>
@@ -7183,7 +5555,7 @@
           <a:p>
             <a:fld id="{8D757EAC-F02C-41AB-966A-B857386BB5B4}" type="datetimeFigureOut">
               <a:rPr lang="en-CA" smtClean="0"/>
-              <a:t>2026-10-21</a:t>
+              <a:t>2026-10-23</a:t>
             </a:fld>
             <a:endParaRPr lang="en-CA"/>
           </a:p>
@@ -7296,7 +5668,7 @@
           <a:p>
             <a:fld id="{8D757EAC-F02C-41AB-966A-B857386BB5B4}" type="datetimeFigureOut">
               <a:rPr lang="en-CA" smtClean="0"/>
-              <a:t>2026-10-21</a:t>
+              <a:t>2026-10-23</a:t>
             </a:fld>
             <a:endParaRPr lang="en-CA"/>
           </a:p>
@@ -7609,7 +5981,7 @@
           <a:p>
             <a:fld id="{8D757EAC-F02C-41AB-966A-B857386BB5B4}" type="datetimeFigureOut">
               <a:rPr lang="en-CA" smtClean="0"/>
-              <a:t>2026-10-21</a:t>
+              <a:t>2026-10-23</a:t>
             </a:fld>
             <a:endParaRPr lang="en-CA"/>
           </a:p>
@@ -7898,7 +6270,7 @@
           <a:p>
             <a:fld id="{8D757EAC-F02C-41AB-966A-B857386BB5B4}" type="datetimeFigureOut">
               <a:rPr lang="en-CA" smtClean="0"/>
-              <a:t>2026-10-21</a:t>
+              <a:t>2026-10-23</a:t>
             </a:fld>
             <a:endParaRPr lang="en-CA"/>
           </a:p>
@@ -8151,7 +6523,7 @@
           <a:p>
             <a:fld id="{8D757EAC-F02C-41AB-966A-B857386BB5B4}" type="datetimeFigureOut">
               <a:rPr lang="en-CA" smtClean="0"/>
-              <a:t>2026-10-21</a:t>
+              <a:t>2026-10-23</a:t>
             </a:fld>
             <a:endParaRPr lang="en-CA"/>
           </a:p>
@@ -8840,7 +7212,7 @@
                 </a:solidFill>
                 <a:latin typeface="Consolas" panose="020B0609020204030204" pitchFamily="49" charset="0"/>
               </a:rPr>
-              <a:t>Attack. Detect. Harden.</a:t>
+              <a:t>Attack. Detect. Harden. Integrate</a:t>
             </a:r>
           </a:p>
         </p:txBody>
@@ -9555,13 +7927,13 @@
   <p:clrMapOvr>
     <a:masterClrMapping/>
   </p:clrMapOvr>
-  <mc:AlternateContent xmlns:mc="http://schemas.openxmlformats.org/markup-compatibility/2006">
-    <mc:Choice xmlns:p159="http://schemas.microsoft.com/office/powerpoint/2015/09/main" Requires="p159">
+  <mc:AlternateContent xmlns:mc="http://schemas.openxmlformats.org/markup-compatibility/2006" xmlns:p159="http://schemas.microsoft.com/office/powerpoint/2015/09/main">
+    <mc:Choice Requires="p159">
       <p:transition xmlns:p14="http://schemas.microsoft.com/office/powerpoint/2010/main" spd="slow" p14:dur="1750" advClick="0" advTm="10000">
         <p159:morph option="byObject"/>
       </p:transition>
     </mc:Choice>
-    <mc:Fallback>
+    <mc:Fallback xmlns="">
       <p:transition spd="slow" advClick="0" advTm="10000">
         <p:fade/>
       </p:transition>
@@ -10367,13 +8739,13 @@
   <p:clrMapOvr>
     <a:masterClrMapping/>
   </p:clrMapOvr>
-  <mc:AlternateContent xmlns:mc="http://schemas.openxmlformats.org/markup-compatibility/2006">
-    <mc:Choice xmlns:p159="http://schemas.microsoft.com/office/powerpoint/2015/09/main" Requires="p159">
+  <mc:AlternateContent xmlns:mc="http://schemas.openxmlformats.org/markup-compatibility/2006" xmlns:p159="http://schemas.microsoft.com/office/powerpoint/2015/09/main">
+    <mc:Choice Requires="p159">
       <p:transition xmlns:p14="http://schemas.microsoft.com/office/powerpoint/2010/main" spd="slow" p14:dur="1750" advClick="0" advTm="11000">
         <p159:morph option="byObject"/>
       </p:transition>
     </mc:Choice>
-    <mc:Fallback>
+    <mc:Fallback xmlns="">
       <p:transition spd="slow" advClick="0" advTm="11000">
         <p:fade/>
       </p:transition>
@@ -11032,13 +9404,13 @@
   <p:clrMapOvr>
     <a:masterClrMapping/>
   </p:clrMapOvr>
-  <mc:AlternateContent xmlns:mc="http://schemas.openxmlformats.org/markup-compatibility/2006">
-    <mc:Choice xmlns:p159="http://schemas.microsoft.com/office/powerpoint/2015/09/main" Requires="p159">
+  <mc:AlternateContent xmlns:mc="http://schemas.openxmlformats.org/markup-compatibility/2006" xmlns:p159="http://schemas.microsoft.com/office/powerpoint/2015/09/main">
+    <mc:Choice Requires="p159">
       <p:transition xmlns:p14="http://schemas.microsoft.com/office/powerpoint/2010/main" spd="slow" p14:dur="1750" advClick="0" advTm="8000">
         <p159:morph option="byObject"/>
       </p:transition>
     </mc:Choice>
-    <mc:Fallback>
+    <mc:Fallback xmlns="">
       <p:transition spd="slow" advClick="0" advTm="8000">
         <p:fade/>
       </p:transition>
@@ -11728,13 +10100,13 @@
   <p:clrMapOvr>
     <a:masterClrMapping/>
   </p:clrMapOvr>
-  <mc:AlternateContent xmlns:mc="http://schemas.openxmlformats.org/markup-compatibility/2006">
-    <mc:Choice xmlns:p159="http://schemas.microsoft.com/office/powerpoint/2015/09/main" Requires="p159">
+  <mc:AlternateContent xmlns:mc="http://schemas.openxmlformats.org/markup-compatibility/2006" xmlns:p159="http://schemas.microsoft.com/office/powerpoint/2015/09/main">
+    <mc:Choice Requires="p159">
       <p:transition xmlns:p14="http://schemas.microsoft.com/office/powerpoint/2010/main" spd="slow" p14:dur="1750" advClick="0" advTm="10000">
         <p159:morph option="byObject"/>
       </p:transition>
     </mc:Choice>
-    <mc:Fallback>
+    <mc:Fallback xmlns="">
       <p:transition spd="slow" advClick="0" advTm="10000">
         <p:fade/>
       </p:transition>
@@ -12493,13 +10865,13 @@
   <p:clrMapOvr>
     <a:masterClrMapping/>
   </p:clrMapOvr>
-  <mc:AlternateContent xmlns:mc="http://schemas.openxmlformats.org/markup-compatibility/2006">
-    <mc:Choice xmlns:p159="http://schemas.microsoft.com/office/powerpoint/2015/09/main" Requires="p159">
+  <mc:AlternateContent xmlns:mc="http://schemas.openxmlformats.org/markup-compatibility/2006" xmlns:p159="http://schemas.microsoft.com/office/powerpoint/2015/09/main">
+    <mc:Choice Requires="p159">
       <p:transition xmlns:p14="http://schemas.microsoft.com/office/powerpoint/2010/main" spd="slow" p14:dur="1750" advClick="0" advTm="10000">
         <p159:morph option="byObject"/>
       </p:transition>
     </mc:Choice>
-    <mc:Fallback>
+    <mc:Fallback xmlns="">
       <p:transition spd="slow" advClick="0" advTm="10000">
         <p:fade/>
       </p:transition>
@@ -13146,13 +11518,13 @@
   <p:clrMapOvr>
     <a:masterClrMapping/>
   </p:clrMapOvr>
-  <mc:AlternateContent xmlns:mc="http://schemas.openxmlformats.org/markup-compatibility/2006">
-    <mc:Choice xmlns:p159="http://schemas.microsoft.com/office/powerpoint/2015/09/main" Requires="p159">
+  <mc:AlternateContent xmlns:mc="http://schemas.openxmlformats.org/markup-compatibility/2006" xmlns:p159="http://schemas.microsoft.com/office/powerpoint/2015/09/main">
+    <mc:Choice Requires="p159">
       <p:transition xmlns:p14="http://schemas.microsoft.com/office/powerpoint/2010/main" spd="slow" p14:dur="1750" advClick="0" advTm="6000">
         <p159:morph option="byObject"/>
       </p:transition>
     </mc:Choice>
-    <mc:Fallback>
+    <mc:Fallback xmlns="">
       <p:transition spd="slow" advClick="0" advTm="6000">
         <p:fade/>
       </p:transition>
@@ -13827,13 +12199,13 @@
   <p:clrMapOvr>
     <a:masterClrMapping/>
   </p:clrMapOvr>
-  <mc:AlternateContent xmlns:mc="http://schemas.openxmlformats.org/markup-compatibility/2006">
-    <mc:Choice xmlns:p159="http://schemas.microsoft.com/office/powerpoint/2015/09/main" Requires="p159">
+  <mc:AlternateContent xmlns:mc="http://schemas.openxmlformats.org/markup-compatibility/2006" xmlns:p159="http://schemas.microsoft.com/office/powerpoint/2015/09/main">
+    <mc:Choice Requires="p159">
       <p:transition xmlns:p14="http://schemas.microsoft.com/office/powerpoint/2010/main" spd="slow" p14:dur="1750" advClick="0" advTm="9000">
         <p159:morph option="byObject"/>
       </p:transition>
     </mc:Choice>
-    <mc:Fallback>
+    <mc:Fallback xmlns="">
       <p:transition spd="slow" advClick="0" advTm="9000">
         <p:fade/>
       </p:transition>
@@ -14619,13 +12991,13 @@
   <p:clrMapOvr>
     <a:masterClrMapping/>
   </p:clrMapOvr>
-  <mc:AlternateContent xmlns:mc="http://schemas.openxmlformats.org/markup-compatibility/2006">
-    <mc:Choice xmlns:p159="http://schemas.microsoft.com/office/powerpoint/2015/09/main" Requires="p159">
+  <mc:AlternateContent xmlns:mc="http://schemas.openxmlformats.org/markup-compatibility/2006" xmlns:p159="http://schemas.microsoft.com/office/powerpoint/2015/09/main">
+    <mc:Choice Requires="p159">
       <p:transition xmlns:p14="http://schemas.microsoft.com/office/powerpoint/2010/main" spd="slow" p14:dur="1750" advClick="0" advTm="13000">
         <p159:morph option="byObject"/>
       </p:transition>
     </mc:Choice>
-    <mc:Fallback>
+    <mc:Fallback xmlns="">
       <p:transition spd="slow" advClick="0" advTm="13000">
         <p:fade/>
       </p:transition>
@@ -15297,13 +13669,13 @@
   <p:clrMapOvr>
     <a:masterClrMapping/>
   </p:clrMapOvr>
-  <mc:AlternateContent xmlns:mc="http://schemas.openxmlformats.org/markup-compatibility/2006">
-    <mc:Choice xmlns:p159="http://schemas.microsoft.com/office/powerpoint/2015/09/main" Requires="p159">
+  <mc:AlternateContent xmlns:mc="http://schemas.openxmlformats.org/markup-compatibility/2006" xmlns:p159="http://schemas.microsoft.com/office/powerpoint/2015/09/main">
+    <mc:Choice Requires="p159">
       <p:transition xmlns:p14="http://schemas.microsoft.com/office/powerpoint/2010/main" spd="slow" p14:dur="1750" advClick="0" advTm="10000">
         <p159:morph option="byObject"/>
       </p:transition>
     </mc:Choice>
-    <mc:Fallback>
+    <mc:Fallback xmlns="">
       <p:transition spd="slow" advClick="0" advTm="10000">
         <p:fade/>
       </p:transition>
@@ -15867,13 +14239,13 @@
   <p:clrMapOvr>
     <a:masterClrMapping/>
   </p:clrMapOvr>
-  <mc:AlternateContent xmlns:mc="http://schemas.openxmlformats.org/markup-compatibility/2006">
-    <mc:Choice xmlns:p159="http://schemas.microsoft.com/office/powerpoint/2015/09/main" Requires="p159">
+  <mc:AlternateContent xmlns:mc="http://schemas.openxmlformats.org/markup-compatibility/2006" xmlns:p159="http://schemas.microsoft.com/office/powerpoint/2015/09/main">
+    <mc:Choice Requires="p159">
       <p:transition xmlns:p14="http://schemas.microsoft.com/office/powerpoint/2010/main" spd="slow" p14:dur="1750" advClick="0" advTm="5000">
         <p159:morph option="byObject"/>
       </p:transition>
     </mc:Choice>
-    <mc:Fallback>
+    <mc:Fallback xmlns="">
       <p:transition spd="slow" advClick="0" advTm="5000">
         <p:fade/>
       </p:transition>
@@ -16461,13 +14833,13 @@
   <p:clrMapOvr>
     <a:masterClrMapping/>
   </p:clrMapOvr>
-  <mc:AlternateContent xmlns:mc="http://schemas.openxmlformats.org/markup-compatibility/2006">
-    <mc:Choice xmlns:p159="http://schemas.microsoft.com/office/powerpoint/2015/09/main" Requires="p159">
+  <mc:AlternateContent xmlns:mc="http://schemas.openxmlformats.org/markup-compatibility/2006" xmlns:p159="http://schemas.microsoft.com/office/powerpoint/2015/09/main">
+    <mc:Choice Requires="p159">
       <p:transition xmlns:p14="http://schemas.microsoft.com/office/powerpoint/2010/main" spd="slow" p14:dur="1750" advClick="0" advTm="8000">
         <p159:morph option="byObject"/>
       </p:transition>
     </mc:Choice>
-    <mc:Fallback>
+    <mc:Fallback xmlns="">
       <p:transition spd="slow" advClick="0" advTm="8000">
         <p:fade/>
       </p:transition>
@@ -17262,13 +15634,13 @@
   <p:clrMapOvr>
     <a:masterClrMapping/>
   </p:clrMapOvr>
-  <mc:AlternateContent xmlns:mc="http://schemas.openxmlformats.org/markup-compatibility/2006">
-    <mc:Choice xmlns:p159="http://schemas.microsoft.com/office/powerpoint/2015/09/main" Requires="p159">
+  <mc:AlternateContent xmlns:mc="http://schemas.openxmlformats.org/markup-compatibility/2006" xmlns:p159="http://schemas.microsoft.com/office/powerpoint/2015/09/main">
+    <mc:Choice Requires="p159">
       <p:transition xmlns:p14="http://schemas.microsoft.com/office/powerpoint/2010/main" spd="slow" p14:dur="1750" advClick="0" advTm="11000">
         <p159:morph option="byObject"/>
       </p:transition>
     </mc:Choice>
-    <mc:Fallback>
+    <mc:Fallback xmlns="">
       <p:transition spd="slow" advClick="0" advTm="11000">
         <p:fade/>
       </p:transition>
@@ -18017,13 +16389,13 @@
   <p:clrMapOvr>
     <a:masterClrMapping/>
   </p:clrMapOvr>
-  <mc:AlternateContent xmlns:mc="http://schemas.openxmlformats.org/markup-compatibility/2006">
-    <mc:Choice xmlns:p159="http://schemas.microsoft.com/office/powerpoint/2015/09/main" Requires="p159">
+  <mc:AlternateContent xmlns:mc="http://schemas.openxmlformats.org/markup-compatibility/2006" xmlns:p159="http://schemas.microsoft.com/office/powerpoint/2015/09/main">
+    <mc:Choice Requires="p159">
       <p:transition xmlns:p14="http://schemas.microsoft.com/office/powerpoint/2010/main" spd="slow" p14:dur="1750" advClick="0" advTm="8000">
         <p159:morph option="byObject"/>
       </p:transition>
     </mc:Choice>
-    <mc:Fallback>
+    <mc:Fallback xmlns="">
       <p:transition spd="slow" advClick="0" advTm="8000">
         <p:fade/>
       </p:transition>
@@ -18733,13 +17105,13 @@
   <p:clrMapOvr>
     <a:masterClrMapping/>
   </p:clrMapOvr>
-  <mc:AlternateContent xmlns:mc="http://schemas.openxmlformats.org/markup-compatibility/2006">
-    <mc:Choice xmlns:p159="http://schemas.microsoft.com/office/powerpoint/2015/09/main" Requires="p159">
+  <mc:AlternateContent xmlns:mc="http://schemas.openxmlformats.org/markup-compatibility/2006" xmlns:p159="http://schemas.microsoft.com/office/powerpoint/2015/09/main">
+    <mc:Choice Requires="p159">
       <p:transition xmlns:p14="http://schemas.microsoft.com/office/powerpoint/2010/main" spd="slow" p14:dur="1750" advClick="0" advTm="10000">
         <p159:morph option="byObject"/>
       </p:transition>
     </mc:Choice>
-    <mc:Fallback>
+    <mc:Fallback xmlns="">
       <p:transition spd="slow" advClick="0" advTm="10000">
         <p:fade/>
       </p:transition>
@@ -20252,13 +18624,13 @@
   <p:clrMapOvr>
     <a:masterClrMapping/>
   </p:clrMapOvr>
-  <mc:AlternateContent xmlns:mc="http://schemas.openxmlformats.org/markup-compatibility/2006">
-    <mc:Choice xmlns:p159="http://schemas.microsoft.com/office/powerpoint/2015/09/main" Requires="p159">
+  <mc:AlternateContent xmlns:mc="http://schemas.openxmlformats.org/markup-compatibility/2006" xmlns:p159="http://schemas.microsoft.com/office/powerpoint/2015/09/main">
+    <mc:Choice Requires="p159">
       <p:transition xmlns:p14="http://schemas.microsoft.com/office/powerpoint/2010/main" spd="slow" p14:dur="1750" advClick="0" advTm="8000">
         <p159:morph option="byObject"/>
       </p:transition>
     </mc:Choice>
-    <mc:Fallback>
+    <mc:Fallback xmlns="">
       <p:transition spd="slow" advClick="0" advTm="8000">
         <p:fade/>
       </p:transition>
@@ -20829,13 +19201,13 @@
   <p:clrMapOvr>
     <a:masterClrMapping/>
   </p:clrMapOvr>
-  <mc:AlternateContent xmlns:mc="http://schemas.openxmlformats.org/markup-compatibility/2006">
-    <mc:Choice xmlns:p159="http://schemas.microsoft.com/office/powerpoint/2015/09/main" Requires="p159">
+  <mc:AlternateContent xmlns:mc="http://schemas.openxmlformats.org/markup-compatibility/2006" xmlns:p159="http://schemas.microsoft.com/office/powerpoint/2015/09/main">
+    <mc:Choice Requires="p159">
       <p:transition xmlns:p14="http://schemas.microsoft.com/office/powerpoint/2010/main" spd="slow" p14:dur="1750" advClick="0" advTm="8000">
         <p159:morph option="byObject"/>
       </p:transition>
     </mc:Choice>
-    <mc:Fallback>
+    <mc:Fallback xmlns="">
       <p:transition spd="slow" advClick="0" advTm="8000">
         <p:fade/>
       </p:transition>
@@ -21445,13 +19817,13 @@
   <p:clrMapOvr>
     <a:masterClrMapping/>
   </p:clrMapOvr>
-  <mc:AlternateContent xmlns:mc="http://schemas.openxmlformats.org/markup-compatibility/2006">
-    <mc:Choice xmlns:p159="http://schemas.microsoft.com/office/powerpoint/2015/09/main" Requires="p159">
+  <mc:AlternateContent xmlns:mc="http://schemas.openxmlformats.org/markup-compatibility/2006" xmlns:p159="http://schemas.microsoft.com/office/powerpoint/2015/09/main">
+    <mc:Choice Requires="p159">
       <p:transition xmlns:p14="http://schemas.microsoft.com/office/powerpoint/2010/main" spd="slow" p14:dur="1750" advClick="0" advTm="8000">
         <p159:morph option="byObject"/>
       </p:transition>
     </mc:Choice>
-    <mc:Fallback>
+    <mc:Fallback xmlns="">
       <p:transition spd="slow" advClick="0" advTm="8000">
         <p:fade/>
       </p:transition>
